--- a/lecons/F5/32_F5_M3_FS03_Sources_of_Population_Data.pptx
+++ b/lecons/F5/32_F5_M3_FS03_Sources_of_Population_Data.pptx
@@ -13024,7 +13024,7 @@
               <a:buNone/>
             </a:pPr>
             <a:r>
-              <a:rPr lang="en-US" sz="4000" b="1" dirty="0">
+              <a:rPr lang="en-US" sz="3200" b="1" dirty="0">
                 <a:solidFill>
                   <a:srgbClr val="111111"/>
                 </a:solidFill>
@@ -13034,7 +13034,7 @@
               </a:rPr>
               <a:t>Topic: The Dynamics of Population and Implications</a:t>
             </a:r>
-            <a:endParaRPr lang="en-US" sz="4000" dirty="0"/>
+            <a:endParaRPr lang="en-US" sz="3200" dirty="0"/>
           </a:p>
           <a:p>
             <a:pPr algn="l" indent="0" marL="0">
@@ -13044,7 +13044,7 @@
               <a:buNone/>
             </a:pPr>
             <a:r>
-              <a:rPr lang="en-US" sz="4000" b="1" dirty="0">
+              <a:rPr lang="en-US" sz="3200" b="1" dirty="0">
                 <a:solidFill>
                   <a:srgbClr val="111111"/>
                 </a:solidFill>
@@ -13054,7 +13054,7 @@
               </a:rPr>
               <a:t>Sub-topic: Population and Population Distribution</a:t>
             </a:r>
-            <a:endParaRPr lang="en-US" sz="4000" dirty="0"/>
+            <a:endParaRPr lang="en-US" sz="3200" dirty="0"/>
           </a:p>
           <a:p>
             <a:pPr algn="l" indent="0" marL="0">
@@ -13064,7 +13064,7 @@
               <a:buNone/>
             </a:pPr>
             <a:r>
-              <a:rPr lang="en-US" sz="4000" b="1" dirty="0">
+              <a:rPr lang="en-US" sz="3200" b="1" dirty="0">
                 <a:solidFill>
                   <a:srgbClr val="990011"/>
                 </a:solidFill>
@@ -13074,7 +13074,7 @@
               </a:rPr>
               <a:t>Further Study 3: Sources of Population Data</a:t>
             </a:r>
-            <a:endParaRPr lang="en-US" sz="4000" dirty="0"/>
+            <a:endParaRPr lang="en-US" sz="3200" dirty="0"/>
           </a:p>
         </p:txBody>
       </p:sp>

--- a/lecons/F5/32_F5_M3_FS03_Sources_of_Population_Data.pptx
+++ b/lecons/F5/32_F5_M3_FS03_Sources_of_Population_Data.pptx
@@ -56,9 +56,11 @@
     <p:sldId id="304" r:id="rId50"/>
     <p:sldId id="305" r:id="rId51"/>
     <p:sldId id="306" r:id="rId52"/>
+    <p:sldId id="307" r:id="rId53"/>
+    <p:sldId id="308" r:id="rId54"/>
   </p:sldIdLst>
   <p:notesMasterIdLst>
-    <p:notesMasterId r:id="rId53"/>
+    <p:notesMasterId r:id="rId55"/>
   </p:notesMasterIdLst>
   <p:sldSz cx="12192000" cy="6858000"/>
   <p:notesSz cx="6858000" cy="12192000"/>
@@ -2928,7 +2930,7 @@
           <a:p>
             <a:r>
               <a:rPr lang="en-US" dirty="0"/>
-              <a:t>Let us copy The Census. The census is organised as follows. On this slide we have Meaning and Methods. Write each point on a new line, with the key term first, and explain it in your own words when we revise. When you finish, we go to the next slide.</a:t>
+              <a:t>Let us copy Meaning and Methods. The census is explained as follows. On this slide we have Meaning and De facto method. Write each point on a new line, with the key term first, and explain it in your own words when we revise. When you finish, we go to the next slide.</a:t>
             </a:r>
             <a:endParaRPr lang="en-US" dirty="0"/>
           </a:p>
@@ -3016,7 +3018,7 @@
           <a:p>
             <a:r>
               <a:rPr lang="en-US" dirty="0"/>
-              <a:t>We continue with The Census. On this slide we have Advantages and Weaknesses. Write each point on a new line, with the key term first, and explain it in your own words when we revise.</a:t>
+              <a:t>We continue with Meaning and Methods. On this slide we have De jure method. Write each point on a new line, with the key term first, and explain it in your own words when we revise.</a:t>
             </a:r>
             <a:endParaRPr lang="en-US" dirty="0"/>
           </a:p>
@@ -3104,7 +3106,7 @@
           <a:p>
             <a:r>
               <a:rPr lang="en-US" dirty="0"/>
-              <a:t>Now draw this illustration in your notebook: sources of population data. Give it a title and label it clearly.</a:t>
+              <a:t>Let us copy Advantages and Weaknesses. The census has the following advantages and weaknesses. On this slide we have Complete data and High cost. Write each point on a new line, with the key term first, and explain it in your own words when we revise. When you finish, we go to the next slide.</a:t>
             </a:r>
             <a:endParaRPr lang="en-US" dirty="0"/>
           </a:p>
@@ -3192,7 +3194,7 @@
           <a:p>
             <a:r>
               <a:rPr lang="en-US" dirty="0"/>
-              <a:t>Let us copy Other Sources. Other sources of population data are the following. On this slide we have Surveys. Write each point on a new line, with the key term first, and explain it in your own words when we revise. When you finish, we go to the next slide.</a:t>
+              <a:t>We continue with Advantages and Weaknesses. On this slide we have Rare and Some people missed. Write each point on a new line, with the key term first, and explain it in your own words when we revise.</a:t>
             </a:r>
             <a:endParaRPr lang="en-US" dirty="0"/>
           </a:p>
@@ -3280,7 +3282,7 @@
           <a:p>
             <a:r>
               <a:rPr lang="en-US" dirty="0"/>
-              <a:t>We continue with Other Sources. On this slide we have Vital registration and Migration records. Write each point on a new line, with the key term first, and explain it in your own words when we revise.</a:t>
+              <a:t>Now draw this illustration in your notebook: sources of population data. Give it a title and label it clearly.</a:t>
             </a:r>
             <a:endParaRPr lang="en-US" dirty="0"/>
           </a:p>
@@ -3368,7 +3370,7 @@
           <a:p>
             <a:r>
               <a:rPr lang="en-US" dirty="0"/>
-              <a:t>Now let us check what you have understood. Question 1: What is a census? Answer in your exercise book.</a:t>
+              <a:t>Let us copy Other Sources. Other sources of population data are the following. On this slide we have Surveys. Write each point on a new line, with the key term first, and explain it in your own words when we revise. When you finish, we go to the next slide.</a:t>
             </a:r>
             <a:endParaRPr lang="en-US" dirty="0"/>
           </a:p>
@@ -3544,7 +3546,7 @@
           <a:p>
             <a:r>
               <a:rPr lang="en-US" dirty="0"/>
-              <a:t>The expected answer is: the official counting of all the people of a country. If you got it right, well done.</a:t>
+              <a:t>We continue with Other Sources. On this slide we have Vital registration and Migration records. Write each point on a new line, with the key term first, and explain it in your own words when we revise.</a:t>
             </a:r>
             <a:endParaRPr lang="en-US" dirty="0"/>
           </a:p>
@@ -3632,7 +3634,7 @@
           <a:p>
             <a:r>
               <a:rPr lang="en-US" dirty="0"/>
-              <a:t>Now let us check what you have understood. Question 2: Give one weakness of vital registration in Cameroon. Answer in your exercise book.</a:t>
+              <a:t>Now let us check what you have understood. Question 1: What is a census? Answer in your exercise book.</a:t>
             </a:r>
             <a:endParaRPr lang="en-US" dirty="0"/>
           </a:p>
@@ -3720,7 +3722,7 @@
           <a:p>
             <a:r>
               <a:rPr lang="en-US" dirty="0"/>
-              <a:t>The expected answer is: many births and deaths are not declared. If you got it right, well done.</a:t>
+              <a:t>The expected answer is: the official counting of all the people of a country. If you got it right, well done.</a:t>
             </a:r>
             <a:endParaRPr lang="en-US" dirty="0"/>
           </a:p>
@@ -3808,7 +3810,7 @@
           <a:p>
             <a:r>
               <a:rPr lang="en-US" dirty="0"/>
-              <a:t>Take your time to copy this part; we will continue together.</a:t>
+              <a:t>Now let us check what you have understood. Question 2: Give one weakness of vital registration in Cameroon. Answer in your exercise book.</a:t>
             </a:r>
             <a:endParaRPr lang="en-US" dirty="0"/>
           </a:p>
@@ -3896,7 +3898,7 @@
           <a:p>
             <a:r>
               <a:rPr lang="en-US" dirty="0"/>
-              <a:t>For those who need more practice, fill in the blanks in your exercise book. The answers are: number 1, BUCREP; number 2, vital; number 3, survey (sample survey).</a:t>
+              <a:t>The expected answer is: many births and deaths are not declared. If you got it right, well done.</a:t>
             </a:r>
             <a:endParaRPr lang="en-US" dirty="0"/>
           </a:p>
@@ -3984,7 +3986,7 @@
           <a:p>
             <a:r>
               <a:rPr lang="en-US" dirty="0"/>
-              <a:t>For your homework: Explain two reasons why census figures in Cameroon may be inaccurate. We shall correct it at the beginning of our next lesson.</a:t>
+              <a:t>Take your time to copy this part; we will continue together.</a:t>
             </a:r>
             <a:endParaRPr lang="en-US" dirty="0"/>
           </a:p>
@@ -4072,7 +4074,7 @@
           <a:p>
             <a:r>
               <a:rPr lang="en-US" dirty="0"/>
-              <a:t>Our next lesson will be on Lesson 29: Population Distribution. Thank you for your attention, and see you next time.</a:t>
+              <a:t>For those who need more practice, fill in the blanks in your exercise book. The answers are: number 1, BUCREP; number 2, vital; number 3, survey (sample survey).</a:t>
             </a:r>
             <a:endParaRPr lang="en-US" dirty="0"/>
           </a:p>
@@ -4160,7 +4162,7 @@
           <a:p>
             <a:r>
               <a:rPr lang="en-US" dirty="0"/>
-              <a:t>Let us play the bilingual game. I say a word in English, and you give me the French word. Then we do the reverse.</a:t>
+              <a:t>For your homework: Explain two reasons why census figures in Cameroon may be inaccurate. We shall correct it at the beginning of our next lesson.</a:t>
             </a:r>
             <a:endParaRPr lang="en-US" dirty="0"/>
           </a:p>
@@ -4248,7 +4250,7 @@
           <a:p>
             <a:r>
               <a:rPr lang="en-US" dirty="0"/>
-              <a:t>I record this information in the official logbook of the class after the lesson.</a:t>
+              <a:t>Our next lesson will be on Lesson 29: Population Distribution. Thank you for your attention, and see you next time.</a:t>
             </a:r>
             <a:endParaRPr lang="en-US" dirty="0"/>
           </a:p>
@@ -4336,7 +4338,7 @@
           <a:p>
             <a:r>
               <a:rPr lang="en-US" dirty="0"/>
-              <a:t>I complete the second page of the logbook: the matter taught, the evaluation, the homework and the attendance.</a:t>
+              <a:t>Let us play the bilingual game. I say a word in English, and you give me the French word. Then we do the reverse.</a:t>
             </a:r>
             <a:endParaRPr lang="en-US" dirty="0"/>
           </a:p>
@@ -4512,7 +4514,7 @@
           <a:p>
             <a:r>
               <a:rPr lang="en-US" dirty="0"/>
-              <a:t>This slide is for me, the teacher: it gives the timing of the lesson and what to do if the projector is not available.</a:t>
+              <a:t>I record this information in the official logbook of the class after the lesson.</a:t>
             </a:r>
             <a:endParaRPr lang="en-US" dirty="0"/>
           </a:p>
@@ -4600,7 +4602,7 @@
           <a:p>
             <a:r>
               <a:rPr lang="en-US" dirty="0"/>
-              <a:t>These are the references and picture credits used to prepare this lesson.</a:t>
+              <a:t>I complete the second page of the logbook: the matter taught, the evaluation, the homework and the attendance.</a:t>
             </a:r>
             <a:endParaRPr lang="en-US" dirty="0"/>
           </a:p>
@@ -4624,6 +4626,182 @@
             <a:fld id="{F7021451-1387-4CA6-816F-3879F97B5CBC}" type="slidenum">
               <a:rPr lang="en-US"/>
               <a:t>51</a:t>
+            </a:fld>
+            <a:endParaRPr lang="en-US"/>
+          </a:p>
+        </p:txBody>
+      </p:sp>
+    </p:spTree>
+    <p:extLst>
+      <p:ext uri="{BB962C8B-B14F-4D97-AF65-F5344CB8AC3E}">
+        <p14:creationId xmlns:p14="http://schemas.microsoft.com/office/powerpoint/2010/main" val="1024086991"/>
+      </p:ext>
+    </p:extLst>
+  </p:cSld>
+  <p:clrMapOvr>
+    <a:masterClrMapping/>
+  </p:clrMapOvr>
+</p:notes>
+</file>
+
+<file path=ppt/notesSlides/notesSlide52.xml><?xml version="1.0" encoding="utf-8"?>
+<p:notes xmlns:a="http://schemas.openxmlformats.org/drawingml/2006/main" xmlns:r="http://schemas.openxmlformats.org/officeDocument/2006/relationships" xmlns:p="http://schemas.openxmlformats.org/presentationml/2006/main">
+  <p:cSld>
+    <p:spTree>
+      <p:nvGrpSpPr>
+        <p:cNvPr id="1" name=""/>
+        <p:cNvGrpSpPr/>
+        <p:nvPr/>
+      </p:nvGrpSpPr>
+      <p:grpSpPr>
+        <a:xfrm>
+          <a:off x="0" y="0"/>
+          <a:ext cx="0" cy="0"/>
+          <a:chOff x="0" y="0"/>
+          <a:chExt cx="0" cy="0"/>
+        </a:xfrm>
+      </p:grpSpPr>
+      <p:sp>
+        <p:nvSpPr>
+          <p:cNvPr id="2" name="Slide Image Placeholder 1"/>
+          <p:cNvSpPr>
+            <a:spLocks noGrp="1" noRot="1" noChangeAspect="1"/>
+          </p:cNvSpPr>
+          <p:nvPr>
+            <p:ph type="sldImg"/>
+          </p:nvPr>
+        </p:nvSpPr>
+        <p:spPr/>
+      </p:sp>
+      <p:sp>
+        <p:nvSpPr>
+          <p:cNvPr id="3" name="Notes Placeholder 2"/>
+          <p:cNvSpPr>
+            <a:spLocks noGrp="1"/>
+          </p:cNvSpPr>
+          <p:nvPr>
+            <p:ph type="body" idx="1"/>
+          </p:nvPr>
+        </p:nvSpPr>
+        <p:spPr/>
+        <p:txBody>
+          <a:bodyPr/>
+          <a:lstStyle/>
+          <a:p>
+            <a:r>
+              <a:rPr lang="en-US" dirty="0"/>
+              <a:t>This slide is for me, the teacher: it gives the timing of the lesson and what to do if the projector is not available.</a:t>
+            </a:r>
+            <a:endParaRPr lang="en-US" dirty="0"/>
+          </a:p>
+        </p:txBody>
+      </p:sp>
+      <p:sp>
+        <p:nvSpPr>
+          <p:cNvPr id="4" name="Slide Number Placeholder 3"/>
+          <p:cNvSpPr>
+            <a:spLocks noGrp="1"/>
+          </p:cNvSpPr>
+          <p:nvPr>
+            <p:ph type="sldNum" sz="quarter" idx="10"/>
+          </p:nvPr>
+        </p:nvSpPr>
+        <p:spPr/>
+        <p:txBody>
+          <a:bodyPr/>
+          <a:lstStyle/>
+          <a:p>
+            <a:fld id="{F7021451-1387-4CA6-816F-3879F97B5CBC}" type="slidenum">
+              <a:rPr lang="en-US"/>
+              <a:t>52</a:t>
+            </a:fld>
+            <a:endParaRPr lang="en-US"/>
+          </a:p>
+        </p:txBody>
+      </p:sp>
+    </p:spTree>
+    <p:extLst>
+      <p:ext uri="{BB962C8B-B14F-4D97-AF65-F5344CB8AC3E}">
+        <p14:creationId xmlns:p14="http://schemas.microsoft.com/office/powerpoint/2010/main" val="1024086991"/>
+      </p:ext>
+    </p:extLst>
+  </p:cSld>
+  <p:clrMapOvr>
+    <a:masterClrMapping/>
+  </p:clrMapOvr>
+</p:notes>
+</file>
+
+<file path=ppt/notesSlides/notesSlide53.xml><?xml version="1.0" encoding="utf-8"?>
+<p:notes xmlns:a="http://schemas.openxmlformats.org/drawingml/2006/main" xmlns:r="http://schemas.openxmlformats.org/officeDocument/2006/relationships" xmlns:p="http://schemas.openxmlformats.org/presentationml/2006/main">
+  <p:cSld>
+    <p:spTree>
+      <p:nvGrpSpPr>
+        <p:cNvPr id="1" name=""/>
+        <p:cNvGrpSpPr/>
+        <p:nvPr/>
+      </p:nvGrpSpPr>
+      <p:grpSpPr>
+        <a:xfrm>
+          <a:off x="0" y="0"/>
+          <a:ext cx="0" cy="0"/>
+          <a:chOff x="0" y="0"/>
+          <a:chExt cx="0" cy="0"/>
+        </a:xfrm>
+      </p:grpSpPr>
+      <p:sp>
+        <p:nvSpPr>
+          <p:cNvPr id="2" name="Slide Image Placeholder 1"/>
+          <p:cNvSpPr>
+            <a:spLocks noGrp="1" noRot="1" noChangeAspect="1"/>
+          </p:cNvSpPr>
+          <p:nvPr>
+            <p:ph type="sldImg"/>
+          </p:nvPr>
+        </p:nvSpPr>
+        <p:spPr/>
+      </p:sp>
+      <p:sp>
+        <p:nvSpPr>
+          <p:cNvPr id="3" name="Notes Placeholder 2"/>
+          <p:cNvSpPr>
+            <a:spLocks noGrp="1"/>
+          </p:cNvSpPr>
+          <p:nvPr>
+            <p:ph type="body" idx="1"/>
+          </p:nvPr>
+        </p:nvSpPr>
+        <p:spPr/>
+        <p:txBody>
+          <a:bodyPr/>
+          <a:lstStyle/>
+          <a:p>
+            <a:r>
+              <a:rPr lang="en-US" dirty="0"/>
+              <a:t>These are the references and picture credits used to prepare this lesson.</a:t>
+            </a:r>
+            <a:endParaRPr lang="en-US" dirty="0"/>
+          </a:p>
+        </p:txBody>
+      </p:sp>
+      <p:sp>
+        <p:nvSpPr>
+          <p:cNvPr id="4" name="Slide Number Placeholder 3"/>
+          <p:cNvSpPr>
+            <a:spLocks noGrp="1"/>
+          </p:cNvSpPr>
+          <p:nvPr>
+            <p:ph type="sldNum" sz="quarter" idx="10"/>
+          </p:nvPr>
+        </p:nvSpPr>
+        <p:spPr/>
+        <p:txBody>
+          <a:bodyPr/>
+          <a:lstStyle/>
+          <a:p>
+            <a:fld id="{F7021451-1387-4CA6-816F-3879F97B5CBC}" type="slidenum">
+              <a:rPr lang="en-US"/>
+              <a:t>53</a:t>
             </a:fld>
             <a:endParaRPr lang="en-US"/>
           </a:p>
@@ -13263,8 +13441,47 @@
         </p:nvSpPr>
         <p:spPr>
           <a:xfrm>
-            <a:off x="2697480" y="1783080"/>
-            <a:ext cx="9174175" cy="4663440"/>
+            <a:off x="2697480" y="1737360"/>
+            <a:ext cx="9174175" cy="457200"/>
+          </a:xfrm>
+          <a:prstGeom prst="rect">
+            <a:avLst/>
+          </a:prstGeom>
+          <a:noFill/>
+          <a:ln/>
+        </p:spPr>
+        <p:txBody>
+          <a:bodyPr wrap="square" lIns="0" tIns="0" rIns="0" bIns="0" rtlCol="0" anchor="ctr"/>
+          <a:lstStyle/>
+          <a:p>
+            <a:pPr algn="l" indent="0" marL="0">
+              <a:buNone/>
+            </a:pPr>
+            <a:r>
+              <a:rPr lang="en-US" sz="3200" b="1" dirty="0">
+                <a:solidFill>
+                  <a:srgbClr val="990011"/>
+                </a:solidFill>
+                <a:latin typeface="Times New Roman" pitchFamily="34" charset="0"/>
+                <a:ea typeface="Times New Roman" pitchFamily="34" charset="-122"/>
+                <a:cs typeface="Times New Roman" pitchFamily="34" charset="-120"/>
+              </a:rPr>
+              <a:t>A) Meaning and Methods</a:t>
+            </a:r>
+            <a:endParaRPr lang="en-US" sz="3200" dirty="0"/>
+          </a:p>
+        </p:txBody>
+      </p:sp>
+      <p:sp>
+        <p:nvSpPr>
+          <p:cNvPr id="6" name="Text 3"/>
+          <p:cNvSpPr/>
+          <p:nvPr/>
+        </p:nvSpPr>
+        <p:spPr>
+          <a:xfrm>
+            <a:off x="2697480" y="2240280"/>
+            <a:ext cx="9174175" cy="4206240"/>
           </a:xfrm>
           <a:prstGeom prst="rect">
             <a:avLst/>
@@ -13291,7 +13508,7 @@
                 <a:ea typeface="Times New Roman" pitchFamily="34" charset="-122"/>
                 <a:cs typeface="Times New Roman" pitchFamily="34" charset="-120"/>
               </a:rPr>
-              <a:t>The census is organised as follows:</a:t>
+              <a:t>The census is explained as follows:</a:t>
             </a:r>
             <a:endParaRPr lang="en-US" sz="4000" dirty="0"/>
           </a:p>
@@ -13348,7 +13565,7 @@
                 <a:ea typeface="Times New Roman" pitchFamily="34" charset="-122"/>
                 <a:cs typeface="Times New Roman" pitchFamily="34" charset="-120"/>
               </a:rPr>
-              <a:t>Methods: </a:t>
+              <a:t>De facto method: </a:t>
             </a:r>
             <a:pPr algn="l" indent="0" marL="0">
               <a:spcAft>
@@ -13365,7 +13582,7 @@
                 <a:ea typeface="Times New Roman" pitchFamily="34" charset="-122"/>
                 <a:cs typeface="Times New Roman" pitchFamily="34" charset="-120"/>
               </a:rPr>
-              <a:t>A de facto census counts people where they are, and a de jure census counts them at their usual home.</a:t>
+              <a:t>People are counted where they are on census night.</a:t>
             </a:r>
             <a:endParaRPr lang="en-US" sz="4000" dirty="0"/>
           </a:p>
@@ -13542,7 +13759,7 @@
                 <a:ea typeface="Times New Roman" pitchFamily="34" charset="-122"/>
                 <a:cs typeface="Times New Roman" pitchFamily="34" charset="-120"/>
               </a:rPr>
-              <a:t>1. The Census (continued)</a:t>
+              <a:t>1. The Census</a:t>
             </a:r>
             <a:endParaRPr lang="en-US" sz="3600" dirty="0"/>
           </a:p>
@@ -13556,8 +13773,47 @@
         </p:nvSpPr>
         <p:spPr>
           <a:xfrm>
-            <a:off x="5349240" y="1783080"/>
-            <a:ext cx="6522415" cy="4663440"/>
+            <a:off x="5349240" y="1737360"/>
+            <a:ext cx="6522415" cy="457200"/>
+          </a:xfrm>
+          <a:prstGeom prst="rect">
+            <a:avLst/>
+          </a:prstGeom>
+          <a:noFill/>
+          <a:ln/>
+        </p:spPr>
+        <p:txBody>
+          <a:bodyPr wrap="square" lIns="0" tIns="0" rIns="0" bIns="0" rtlCol="0" anchor="ctr"/>
+          <a:lstStyle/>
+          <a:p>
+            <a:pPr algn="l" indent="0" marL="0">
+              <a:buNone/>
+            </a:pPr>
+            <a:r>
+              <a:rPr lang="en-US" sz="3000" b="1" dirty="0">
+                <a:solidFill>
+                  <a:srgbClr val="990011"/>
+                </a:solidFill>
+                <a:latin typeface="Times New Roman" pitchFamily="34" charset="0"/>
+                <a:ea typeface="Times New Roman" pitchFamily="34" charset="-122"/>
+                <a:cs typeface="Times New Roman" pitchFamily="34" charset="-120"/>
+              </a:rPr>
+              <a:t>A) Meaning and Methods (continued)</a:t>
+            </a:r>
+            <a:endParaRPr lang="en-US" sz="3000" dirty="0"/>
+          </a:p>
+        </p:txBody>
+      </p:sp>
+      <p:sp>
+        <p:nvSpPr>
+          <p:cNvPr id="6" name="Text 3"/>
+          <p:cNvSpPr/>
+          <p:nvPr/>
+        </p:nvSpPr>
+        <p:spPr>
+          <a:xfrm>
+            <a:off x="5349240" y="2240280"/>
+            <a:ext cx="6522415" cy="4206240"/>
           </a:xfrm>
           <a:prstGeom prst="rect">
             <a:avLst/>
@@ -13584,7 +13840,7 @@
                 <a:ea typeface="Times New Roman" pitchFamily="34" charset="-122"/>
                 <a:cs typeface="Times New Roman" pitchFamily="34" charset="-120"/>
               </a:rPr>
-              <a:t>Advantages: </a:t>
+              <a:t>De jure method: </a:t>
             </a:r>
             <a:pPr algn="l" indent="0" marL="0">
               <a:spcAft>
@@ -13601,44 +13857,7 @@
                 <a:ea typeface="Times New Roman" pitchFamily="34" charset="-122"/>
                 <a:cs typeface="Times New Roman" pitchFamily="34" charset="-120"/>
               </a:rPr>
-              <a:t>It gives complete data on age, sex, education and housing.</a:t>
-            </a:r>
-            <a:endParaRPr lang="en-US" sz="4000" dirty="0"/>
-          </a:p>
-          <a:p>
-            <a:pPr algn="l" indent="0" marL="0">
-              <a:spcAft>
-                <a:spcPts val="800"/>
-              </a:spcAft>
-              <a:buNone/>
-            </a:pPr>
-            <a:r>
-              <a:rPr lang="en-US" sz="4000" b="1" dirty="0">
-                <a:solidFill>
-                  <a:srgbClr val="111111"/>
-                </a:solidFill>
-                <a:latin typeface="Times New Roman" pitchFamily="34" charset="0"/>
-                <a:ea typeface="Times New Roman" pitchFamily="34" charset="-122"/>
-                <a:cs typeface="Times New Roman" pitchFamily="34" charset="-120"/>
-              </a:rPr>
-              <a:t>Weaknesses: </a:t>
-            </a:r>
-            <a:pPr algn="l" indent="0" marL="0">
-              <a:spcAft>
-                <a:spcPts val="800"/>
-              </a:spcAft>
-              <a:buNone/>
-            </a:pPr>
-            <a:r>
-              <a:rPr lang="en-US" sz="4000" dirty="0">
-                <a:solidFill>
-                  <a:srgbClr val="111111"/>
-                </a:solidFill>
-                <a:latin typeface="Times New Roman" pitchFamily="34" charset="0"/>
-                <a:ea typeface="Times New Roman" pitchFamily="34" charset="-122"/>
-                <a:cs typeface="Times New Roman" pitchFamily="34" charset="-120"/>
-              </a:rPr>
-              <a:t>It is costly, rare and some people are not counted.</a:t>
+              <a:t>People are counted at their usual home.</a:t>
             </a:r>
             <a:endParaRPr lang="en-US" sz="4000" dirty="0"/>
           </a:p>
@@ -13756,48 +13975,9 @@
           </a:p>
         </p:txBody>
       </p:sp>
-      <p:sp>
-        <p:nvSpPr>
-          <p:cNvPr id="3" name="Text 1"/>
-          <p:cNvSpPr/>
-          <p:nvPr/>
-        </p:nvSpPr>
-        <p:spPr>
-          <a:xfrm>
-            <a:off x="457200" y="1005840"/>
-            <a:ext cx="11277295" cy="731520"/>
-          </a:xfrm>
-          <a:prstGeom prst="rect">
-            <a:avLst/>
-          </a:prstGeom>
-          <a:noFill/>
-          <a:ln/>
-        </p:spPr>
-        <p:txBody>
-          <a:bodyPr wrap="square" lIns="0" tIns="0" rIns="0" bIns="0" rtlCol="0" anchor="ctr"/>
-          <a:lstStyle/>
-          <a:p>
-            <a:pPr algn="ctr" indent="0" marL="0">
-              <a:buNone/>
-            </a:pPr>
-            <a:r>
-              <a:rPr lang="en-US" sz="3600" b="1" dirty="0">
-                <a:solidFill>
-                  <a:srgbClr val="990011"/>
-                </a:solidFill>
-                <a:latin typeface="Times New Roman" pitchFamily="34" charset="0"/>
-                <a:ea typeface="Times New Roman" pitchFamily="34" charset="-122"/>
-                <a:cs typeface="Times New Roman" pitchFamily="34" charset="-120"/>
-              </a:rPr>
-              <a:t>1. The Census</a:t>
-            </a:r>
-            <a:endParaRPr lang="en-US" sz="3600" dirty="0"/>
-          </a:p>
-        </p:txBody>
-      </p:sp>
       <p:pic>
         <p:nvPicPr>
-          <p:cNvPr id="4" name="Image 0" descr="/home/claude/f4/img/v2/data_sources_big.png">    </p:cNvPr>
+          <p:cNvPr id="3" name="Image 0" descr="/home/claude/f4/img/minesec_sheet.png">    </p:cNvPr>
           <p:cNvPicPr>
             <a:picLocks noChangeAspect="1"/>
           </p:cNvPicPr>
@@ -13811,8 +13991,8 @@
         </p:blipFill>
         <p:spPr>
           <a:xfrm>
-            <a:off x="629930" y="1783080"/>
-            <a:ext cx="10931835" cy="4270248"/>
+            <a:off x="0" y="658368"/>
+            <a:ext cx="3840480" cy="5833872"/>
           </a:xfrm>
           <a:prstGeom prst="rect">
             <a:avLst/>
@@ -13821,14 +14001,14 @@
       </p:pic>
       <p:sp>
         <p:nvSpPr>
-          <p:cNvPr id="5" name="Text 2"/>
+          <p:cNvPr id="4" name="Text 1"/>
           <p:cNvSpPr/>
           <p:nvPr/>
         </p:nvSpPr>
         <p:spPr>
           <a:xfrm>
-            <a:off x="457200" y="6089904"/>
-            <a:ext cx="11277295" cy="347472"/>
+            <a:off x="4069080" y="1005840"/>
+            <a:ext cx="7802575" cy="731520"/>
           </a:xfrm>
           <a:prstGeom prst="rect">
             <a:avLst/>
@@ -13837,24 +14017,181 @@
           <a:ln/>
         </p:spPr>
         <p:txBody>
-          <a:bodyPr wrap="square" lIns="0" tIns="0" rIns="0" bIns="0" rtlCol="0" anchor="ctr"/>
+          <a:bodyPr wrap="square" lIns="0" tIns="0" rIns="0" bIns="0" rtlCol="0" anchor="ctr">
+            <a:normAutofit/>
+          </a:bodyPr>
           <a:lstStyle/>
           <a:p>
             <a:pPr algn="ctr" indent="0" marL="0">
               <a:buNone/>
             </a:pPr>
             <a:r>
-              <a:rPr lang="en-US" sz="1800" i="1" dirty="0">
-                <a:solidFill>
-                  <a:srgbClr val="555555"/>
+              <a:rPr lang="en-US" sz="3600" b="1" dirty="0">
+                <a:solidFill>
+                  <a:srgbClr val="990011"/>
                 </a:solidFill>
                 <a:latin typeface="Times New Roman" pitchFamily="34" charset="0"/>
                 <a:ea typeface="Times New Roman" pitchFamily="34" charset="-122"/>
                 <a:cs typeface="Times New Roman" pitchFamily="34" charset="-120"/>
               </a:rPr>
-              <a:t>Illustration: sources of population data</a:t>
-            </a:r>
-            <a:endParaRPr lang="en-US" sz="1800" dirty="0"/>
+              <a:t>1. The Census</a:t>
+            </a:r>
+            <a:endParaRPr lang="en-US" sz="3600" dirty="0"/>
+          </a:p>
+        </p:txBody>
+      </p:sp>
+      <p:sp>
+        <p:nvSpPr>
+          <p:cNvPr id="5" name="Text 2"/>
+          <p:cNvSpPr/>
+          <p:nvPr/>
+        </p:nvSpPr>
+        <p:spPr>
+          <a:xfrm>
+            <a:off x="4069080" y="1737360"/>
+            <a:ext cx="7802575" cy="457200"/>
+          </a:xfrm>
+          <a:prstGeom prst="rect">
+            <a:avLst/>
+          </a:prstGeom>
+          <a:noFill/>
+          <a:ln/>
+        </p:spPr>
+        <p:txBody>
+          <a:bodyPr wrap="square" lIns="0" tIns="0" rIns="0" bIns="0" rtlCol="0" anchor="ctr"/>
+          <a:lstStyle/>
+          <a:p>
+            <a:pPr algn="l" indent="0" marL="0">
+              <a:buNone/>
+            </a:pPr>
+            <a:r>
+              <a:rPr lang="en-US" sz="3200" b="1" dirty="0">
+                <a:solidFill>
+                  <a:srgbClr val="990011"/>
+                </a:solidFill>
+                <a:latin typeface="Times New Roman" pitchFamily="34" charset="0"/>
+                <a:ea typeface="Times New Roman" pitchFamily="34" charset="-122"/>
+                <a:cs typeface="Times New Roman" pitchFamily="34" charset="-120"/>
+              </a:rPr>
+              <a:t>B) Advantages and Weaknesses</a:t>
+            </a:r>
+            <a:endParaRPr lang="en-US" sz="3200" dirty="0"/>
+          </a:p>
+        </p:txBody>
+      </p:sp>
+      <p:sp>
+        <p:nvSpPr>
+          <p:cNvPr id="6" name="Text 3"/>
+          <p:cNvSpPr/>
+          <p:nvPr/>
+        </p:nvSpPr>
+        <p:spPr>
+          <a:xfrm>
+            <a:off x="4069080" y="2240280"/>
+            <a:ext cx="7802575" cy="4206240"/>
+          </a:xfrm>
+          <a:prstGeom prst="rect">
+            <a:avLst/>
+          </a:prstGeom>
+          <a:noFill/>
+          <a:ln/>
+        </p:spPr>
+        <p:txBody>
+          <a:bodyPr wrap="square" lIns="0" tIns="0" rIns="0" bIns="0" rtlCol="0" anchor="t"/>
+          <a:lstStyle/>
+          <a:p>
+            <a:pPr algn="l" indent="0" marL="0">
+              <a:spcAft>
+                <a:spcPts val="800"/>
+              </a:spcAft>
+              <a:buNone/>
+            </a:pPr>
+            <a:r>
+              <a:rPr lang="en-US" sz="4000" i="1" dirty="0">
+                <a:solidFill>
+                  <a:srgbClr val="111111"/>
+                </a:solidFill>
+                <a:latin typeface="Times New Roman" pitchFamily="34" charset="0"/>
+                <a:ea typeface="Times New Roman" pitchFamily="34" charset="-122"/>
+                <a:cs typeface="Times New Roman" pitchFamily="34" charset="-120"/>
+              </a:rPr>
+              <a:t>The census has the following advantages and weaknesses:</a:t>
+            </a:r>
+            <a:endParaRPr lang="en-US" sz="4000" dirty="0"/>
+          </a:p>
+          <a:p>
+            <a:pPr algn="l" indent="0" marL="0">
+              <a:spcAft>
+                <a:spcPts val="800"/>
+              </a:spcAft>
+              <a:buNone/>
+            </a:pPr>
+            <a:r>
+              <a:rPr lang="en-US" sz="4000" b="1" dirty="0">
+                <a:solidFill>
+                  <a:srgbClr val="111111"/>
+                </a:solidFill>
+                <a:latin typeface="Times New Roman" pitchFamily="34" charset="0"/>
+                <a:ea typeface="Times New Roman" pitchFamily="34" charset="-122"/>
+                <a:cs typeface="Times New Roman" pitchFamily="34" charset="-120"/>
+              </a:rPr>
+              <a:t>Complete data: </a:t>
+            </a:r>
+            <a:pPr algn="l" indent="0" marL="0">
+              <a:spcAft>
+                <a:spcPts val="800"/>
+              </a:spcAft>
+              <a:buNone/>
+            </a:pPr>
+            <a:r>
+              <a:rPr lang="en-US" sz="4000" dirty="0">
+                <a:solidFill>
+                  <a:srgbClr val="111111"/>
+                </a:solidFill>
+                <a:latin typeface="Times New Roman" pitchFamily="34" charset="0"/>
+                <a:ea typeface="Times New Roman" pitchFamily="34" charset="-122"/>
+                <a:cs typeface="Times New Roman" pitchFamily="34" charset="-120"/>
+              </a:rPr>
+              <a:t>It gives data on age, sex, education and housing.</a:t>
+            </a:r>
+            <a:endParaRPr lang="en-US" sz="4000" dirty="0"/>
+          </a:p>
+          <a:p>
+            <a:pPr algn="l" indent="0" marL="0">
+              <a:spcAft>
+                <a:spcPts val="800"/>
+              </a:spcAft>
+              <a:buNone/>
+            </a:pPr>
+            <a:r>
+              <a:rPr lang="en-US" sz="4000" b="1" dirty="0">
+                <a:solidFill>
+                  <a:srgbClr val="111111"/>
+                </a:solidFill>
+                <a:latin typeface="Times New Roman" pitchFamily="34" charset="0"/>
+                <a:ea typeface="Times New Roman" pitchFamily="34" charset="-122"/>
+                <a:cs typeface="Times New Roman" pitchFamily="34" charset="-120"/>
+              </a:rPr>
+              <a:t>High cost: </a:t>
+            </a:r>
+            <a:pPr algn="l" indent="0" marL="0">
+              <a:spcAft>
+                <a:spcPts val="800"/>
+              </a:spcAft>
+              <a:buNone/>
+            </a:pPr>
+            <a:r>
+              <a:rPr lang="en-US" sz="4000" dirty="0">
+                <a:solidFill>
+                  <a:srgbClr val="111111"/>
+                </a:solidFill>
+                <a:latin typeface="Times New Roman" pitchFamily="34" charset="0"/>
+                <a:ea typeface="Times New Roman" pitchFamily="34" charset="-122"/>
+                <a:cs typeface="Times New Roman" pitchFamily="34" charset="-120"/>
+              </a:rPr>
+              <a:t>It is very expensive to organise.</a:t>
+            </a:r>
+            <a:endParaRPr lang="en-US" sz="4000" dirty="0"/>
           </a:p>
         </p:txBody>
       </p:sp>
@@ -14029,7 +14366,7 @@
                 <a:ea typeface="Times New Roman" pitchFamily="34" charset="-122"/>
                 <a:cs typeface="Times New Roman" pitchFamily="34" charset="-120"/>
               </a:rPr>
-              <a:t>2. Other Sources</a:t>
+              <a:t>1. The Census</a:t>
             </a:r>
             <a:endParaRPr lang="en-US" sz="3600" dirty="0"/>
           </a:p>
@@ -14043,8 +14380,47 @@
         </p:nvSpPr>
         <p:spPr>
           <a:xfrm>
-            <a:off x="5349240" y="1783080"/>
-            <a:ext cx="6522415" cy="4663440"/>
+            <a:off x="5349240" y="1737360"/>
+            <a:ext cx="6522415" cy="457200"/>
+          </a:xfrm>
+          <a:prstGeom prst="rect">
+            <a:avLst/>
+          </a:prstGeom>
+          <a:noFill/>
+          <a:ln/>
+        </p:spPr>
+        <p:txBody>
+          <a:bodyPr wrap="square" lIns="0" tIns="0" rIns="0" bIns="0" rtlCol="0" anchor="ctr"/>
+          <a:lstStyle/>
+          <a:p>
+            <a:pPr algn="l" indent="0" marL="0">
+              <a:buNone/>
+            </a:pPr>
+            <a:r>
+              <a:rPr lang="en-US" sz="2500" b="1" dirty="0">
+                <a:solidFill>
+                  <a:srgbClr val="990011"/>
+                </a:solidFill>
+                <a:latin typeface="Times New Roman" pitchFamily="34" charset="0"/>
+                <a:ea typeface="Times New Roman" pitchFamily="34" charset="-122"/>
+                <a:cs typeface="Times New Roman" pitchFamily="34" charset="-120"/>
+              </a:rPr>
+              <a:t>B) Advantages and Weaknesses (continued)</a:t>
+            </a:r>
+            <a:endParaRPr lang="en-US" sz="2500" dirty="0"/>
+          </a:p>
+        </p:txBody>
+      </p:sp>
+      <p:sp>
+        <p:nvSpPr>
+          <p:cNvPr id="6" name="Text 3"/>
+          <p:cNvSpPr/>
+          <p:nvPr/>
+        </p:nvSpPr>
+        <p:spPr>
+          <a:xfrm>
+            <a:off x="5349240" y="2240280"/>
+            <a:ext cx="6522415" cy="4206240"/>
           </a:xfrm>
           <a:prstGeom prst="rect">
             <a:avLst/>
@@ -14063,7 +14439,7 @@
               <a:buNone/>
             </a:pPr>
             <a:r>
-              <a:rPr lang="en-US" sz="4000" i="1" dirty="0">
+              <a:rPr lang="en-US" sz="4000" b="1" dirty="0">
                 <a:solidFill>
                   <a:srgbClr val="111111"/>
                 </a:solidFill>
@@ -14071,11 +14447,8 @@
                 <a:ea typeface="Times New Roman" pitchFamily="34" charset="-122"/>
                 <a:cs typeface="Times New Roman" pitchFamily="34" charset="-120"/>
               </a:rPr>
-              <a:t>Other sources of population data are the following:</a:t>
-            </a:r>
-            <a:endParaRPr lang="en-US" sz="4000" dirty="0"/>
-          </a:p>
-          <a:p>
+              <a:t>Rare: </a:t>
+            </a:r>
             <a:pPr algn="l" indent="0" marL="0">
               <a:spcAft>
                 <a:spcPts val="800"/>
@@ -14083,7 +14456,7 @@
               <a:buNone/>
             </a:pPr>
             <a:r>
-              <a:rPr lang="en-US" sz="4000" b="1" dirty="0">
+              <a:rPr lang="en-US" sz="4000" dirty="0">
                 <a:solidFill>
                   <a:srgbClr val="111111"/>
                 </a:solidFill>
@@ -14091,8 +14464,11 @@
                 <a:ea typeface="Times New Roman" pitchFamily="34" charset="-122"/>
                 <a:cs typeface="Times New Roman" pitchFamily="34" charset="-120"/>
               </a:rPr>
-              <a:t>Surveys: </a:t>
-            </a:r>
+              <a:t>It is held only every ten years or less often.</a:t>
+            </a:r>
+            <a:endParaRPr lang="en-US" sz="4000" dirty="0"/>
+          </a:p>
+          <a:p>
             <a:pPr algn="l" indent="0" marL="0">
               <a:spcAft>
                 <a:spcPts val="800"/>
@@ -14100,7 +14476,7 @@
               <a:buNone/>
             </a:pPr>
             <a:r>
-              <a:rPr lang="en-US" sz="4000" dirty="0">
+              <a:rPr lang="en-US" sz="4000" b="1" dirty="0">
                 <a:solidFill>
                   <a:srgbClr val="111111"/>
                 </a:solidFill>
@@ -14108,7 +14484,24 @@
                 <a:ea typeface="Times New Roman" pitchFamily="34" charset="-122"/>
                 <a:cs typeface="Times New Roman" pitchFamily="34" charset="-120"/>
               </a:rPr>
-              <a:t>They study a sample of the population, and they are cheap but less complete.</a:t>
+              <a:t>Some people missed: </a:t>
+            </a:r>
+            <a:pPr algn="l" indent="0" marL="0">
+              <a:spcAft>
+                <a:spcPts val="800"/>
+              </a:spcAft>
+              <a:buNone/>
+            </a:pPr>
+            <a:r>
+              <a:rPr lang="en-US" sz="4000" dirty="0">
+                <a:solidFill>
+                  <a:srgbClr val="111111"/>
+                </a:solidFill>
+                <a:latin typeface="Times New Roman" pitchFamily="34" charset="0"/>
+                <a:ea typeface="Times New Roman" pitchFamily="34" charset="-122"/>
+                <a:cs typeface="Times New Roman" pitchFamily="34" charset="-120"/>
+              </a:rPr>
+              <a:t>Some people are not counted.</a:t>
             </a:r>
             <a:endParaRPr lang="en-US" sz="4000" dirty="0"/>
           </a:p>
@@ -14226,9 +14619,48 @@
           </a:p>
         </p:txBody>
       </p:sp>
+      <p:sp>
+        <p:nvSpPr>
+          <p:cNvPr id="3" name="Text 1"/>
+          <p:cNvSpPr/>
+          <p:nvPr/>
+        </p:nvSpPr>
+        <p:spPr>
+          <a:xfrm>
+            <a:off x="457200" y="1005840"/>
+            <a:ext cx="11277295" cy="731520"/>
+          </a:xfrm>
+          <a:prstGeom prst="rect">
+            <a:avLst/>
+          </a:prstGeom>
+          <a:noFill/>
+          <a:ln/>
+        </p:spPr>
+        <p:txBody>
+          <a:bodyPr wrap="square" lIns="0" tIns="0" rIns="0" bIns="0" rtlCol="0" anchor="ctr"/>
+          <a:lstStyle/>
+          <a:p>
+            <a:pPr algn="ctr" indent="0" marL="0">
+              <a:buNone/>
+            </a:pPr>
+            <a:r>
+              <a:rPr lang="en-US" sz="3600" b="1" dirty="0">
+                <a:solidFill>
+                  <a:srgbClr val="990011"/>
+                </a:solidFill>
+                <a:latin typeface="Times New Roman" pitchFamily="34" charset="0"/>
+                <a:ea typeface="Times New Roman" pitchFamily="34" charset="-122"/>
+                <a:cs typeface="Times New Roman" pitchFamily="34" charset="-120"/>
+              </a:rPr>
+              <a:t>1. The Census</a:t>
+            </a:r>
+            <a:endParaRPr lang="en-US" sz="3600" dirty="0"/>
+          </a:p>
+        </p:txBody>
+      </p:sp>
       <p:pic>
         <p:nvPicPr>
-          <p:cNvPr id="3" name="Image 0" descr="/home/claude/f4/img/minesec_sheet.png">    </p:cNvPr>
+          <p:cNvPr id="4" name="Image 0" descr="/home/claude/f4/img/v2/data_sources_big.png">    </p:cNvPr>
           <p:cNvPicPr>
             <a:picLocks noChangeAspect="1"/>
           </p:cNvPicPr>
@@ -14242,8 +14674,8 @@
         </p:blipFill>
         <p:spPr>
           <a:xfrm>
-            <a:off x="0" y="658368"/>
-            <a:ext cx="3840480" cy="5833872"/>
+            <a:off x="629930" y="1783080"/>
+            <a:ext cx="10931835" cy="4270248"/>
           </a:xfrm>
           <a:prstGeom prst="rect">
             <a:avLst/>
@@ -14252,14 +14684,14 @@
       </p:pic>
       <p:sp>
         <p:nvSpPr>
-          <p:cNvPr id="4" name="Text 1"/>
+          <p:cNvPr id="5" name="Text 2"/>
           <p:cNvSpPr/>
           <p:nvPr/>
         </p:nvSpPr>
         <p:spPr>
           <a:xfrm>
-            <a:off x="4069080" y="1005840"/>
-            <a:ext cx="7802575" cy="731520"/>
+            <a:off x="457200" y="6089904"/>
+            <a:ext cx="11277295" cy="347472"/>
           </a:xfrm>
           <a:prstGeom prst="rect">
             <a:avLst/>
@@ -14268,122 +14700,24 @@
           <a:ln/>
         </p:spPr>
         <p:txBody>
-          <a:bodyPr wrap="square" lIns="0" tIns="0" rIns="0" bIns="0" rtlCol="0" anchor="ctr">
-            <a:normAutofit/>
-          </a:bodyPr>
+          <a:bodyPr wrap="square" lIns="0" tIns="0" rIns="0" bIns="0" rtlCol="0" anchor="ctr"/>
           <a:lstStyle/>
           <a:p>
             <a:pPr algn="ctr" indent="0" marL="0">
               <a:buNone/>
             </a:pPr>
             <a:r>
-              <a:rPr lang="en-US" sz="3600" b="1" dirty="0">
-                <a:solidFill>
-                  <a:srgbClr val="990011"/>
+              <a:rPr lang="en-US" sz="1800" i="1" dirty="0">
+                <a:solidFill>
+                  <a:srgbClr val="555555"/>
                 </a:solidFill>
                 <a:latin typeface="Times New Roman" pitchFamily="34" charset="0"/>
                 <a:ea typeface="Times New Roman" pitchFamily="34" charset="-122"/>
                 <a:cs typeface="Times New Roman" pitchFamily="34" charset="-120"/>
               </a:rPr>
-              <a:t>2. Other Sources (continued)</a:t>
-            </a:r>
-            <a:endParaRPr lang="en-US" sz="3600" dirty="0"/>
-          </a:p>
-        </p:txBody>
-      </p:sp>
-      <p:sp>
-        <p:nvSpPr>
-          <p:cNvPr id="5" name="Text 2"/>
-          <p:cNvSpPr/>
-          <p:nvPr/>
-        </p:nvSpPr>
-        <p:spPr>
-          <a:xfrm>
-            <a:off x="4069080" y="1783080"/>
-            <a:ext cx="7802575" cy="4663440"/>
-          </a:xfrm>
-          <a:prstGeom prst="rect">
-            <a:avLst/>
-          </a:prstGeom>
-          <a:noFill/>
-          <a:ln/>
-        </p:spPr>
-        <p:txBody>
-          <a:bodyPr wrap="square" lIns="0" tIns="0" rIns="0" bIns="0" rtlCol="0" anchor="t"/>
-          <a:lstStyle/>
-          <a:p>
-            <a:pPr algn="l" indent="0" marL="0">
-              <a:spcAft>
-                <a:spcPts val="800"/>
-              </a:spcAft>
-              <a:buNone/>
-            </a:pPr>
-            <a:r>
-              <a:rPr lang="en-US" sz="4000" b="1" dirty="0">
-                <a:solidFill>
-                  <a:srgbClr val="111111"/>
-                </a:solidFill>
-                <a:latin typeface="Times New Roman" pitchFamily="34" charset="0"/>
-                <a:ea typeface="Times New Roman" pitchFamily="34" charset="-122"/>
-                <a:cs typeface="Times New Roman" pitchFamily="34" charset="-120"/>
-              </a:rPr>
-              <a:t>Vital registration: </a:t>
-            </a:r>
-            <a:pPr algn="l" indent="0" marL="0">
-              <a:spcAft>
-                <a:spcPts val="800"/>
-              </a:spcAft>
-              <a:buNone/>
-            </a:pPr>
-            <a:r>
-              <a:rPr lang="en-US" sz="4000" dirty="0">
-                <a:solidFill>
-                  <a:srgbClr val="111111"/>
-                </a:solidFill>
-                <a:latin typeface="Times New Roman" pitchFamily="34" charset="0"/>
-                <a:ea typeface="Times New Roman" pitchFamily="34" charset="-122"/>
-                <a:cs typeface="Times New Roman" pitchFamily="34" charset="-120"/>
-              </a:rPr>
-              <a:t>It records births, deaths and marriages, but many events are not declared.</a:t>
-            </a:r>
-            <a:endParaRPr lang="en-US" sz="4000" dirty="0"/>
-          </a:p>
-          <a:p>
-            <a:pPr algn="l" indent="0" marL="0">
-              <a:spcAft>
-                <a:spcPts val="800"/>
-              </a:spcAft>
-              <a:buNone/>
-            </a:pPr>
-            <a:r>
-              <a:rPr lang="en-US" sz="4000" b="1" dirty="0">
-                <a:solidFill>
-                  <a:srgbClr val="111111"/>
-                </a:solidFill>
-                <a:latin typeface="Times New Roman" pitchFamily="34" charset="0"/>
-                <a:ea typeface="Times New Roman" pitchFamily="34" charset="-122"/>
-                <a:cs typeface="Times New Roman" pitchFamily="34" charset="-120"/>
-              </a:rPr>
-              <a:t>Migration records: </a:t>
-            </a:r>
-            <a:pPr algn="l" indent="0" marL="0">
-              <a:spcAft>
-                <a:spcPts val="800"/>
-              </a:spcAft>
-              <a:buNone/>
-            </a:pPr>
-            <a:r>
-              <a:rPr lang="en-US" sz="4000" dirty="0">
-                <a:solidFill>
-                  <a:srgbClr val="111111"/>
-                </a:solidFill>
-                <a:latin typeface="Times New Roman" pitchFamily="34" charset="0"/>
-                <a:ea typeface="Times New Roman" pitchFamily="34" charset="-122"/>
-                <a:cs typeface="Times New Roman" pitchFamily="34" charset="-120"/>
-              </a:rPr>
-              <a:t>They record people crossing borders, but clandestine migrants escape them.</a:t>
-            </a:r>
-            <a:endParaRPr lang="en-US" sz="4000" dirty="0"/>
+              <a:t>Illustration: sources of population data</a:t>
+            </a:r>
+            <a:endParaRPr lang="en-US" sz="1800" dirty="0"/>
           </a:p>
         </p:txBody>
       </p:sp>
@@ -14493,7 +14827,7 @@
                 <a:ea typeface="Calibri" pitchFamily="34" charset="-122"/>
                 <a:cs typeface="Calibri" pitchFamily="34" charset="-120"/>
               </a:rPr>
-              <a:t>FORMATIVE EVALUATION</a:t>
+              <a:t>BOARD SUMMARY</a:t>
             </a:r>
             <a:endParaRPr lang="en-US" sz="1400" dirty="0"/>
           </a:p>
@@ -14558,7 +14892,7 @@
                 <a:ea typeface="Times New Roman" pitchFamily="34" charset="-122"/>
                 <a:cs typeface="Times New Roman" pitchFamily="34" charset="-120"/>
               </a:rPr>
-              <a:t>Evaluation 1</a:t>
+              <a:t>2. Other Sources</a:t>
             </a:r>
             <a:endParaRPr lang="en-US" sz="3600" dirty="0"/>
           </a:p>
@@ -14592,7 +14926,7 @@
               <a:buNone/>
             </a:pPr>
             <a:r>
-              <a:rPr lang="en-US" sz="4000" dirty="0">
+              <a:rPr lang="en-US" sz="4000" i="1" dirty="0">
                 <a:solidFill>
                   <a:srgbClr val="111111"/>
                 </a:solidFill>
@@ -14600,7 +14934,44 @@
                 <a:ea typeface="Times New Roman" pitchFamily="34" charset="-122"/>
                 <a:cs typeface="Times New Roman" pitchFamily="34" charset="-120"/>
               </a:rPr>
-              <a:t>What is a census?</a:t>
+              <a:t>Other sources of population data are the following:</a:t>
+            </a:r>
+            <a:endParaRPr lang="en-US" sz="4000" dirty="0"/>
+          </a:p>
+          <a:p>
+            <a:pPr algn="l" indent="0" marL="0">
+              <a:spcAft>
+                <a:spcPts val="800"/>
+              </a:spcAft>
+              <a:buNone/>
+            </a:pPr>
+            <a:r>
+              <a:rPr lang="en-US" sz="4000" b="1" dirty="0">
+                <a:solidFill>
+                  <a:srgbClr val="111111"/>
+                </a:solidFill>
+                <a:latin typeface="Times New Roman" pitchFamily="34" charset="0"/>
+                <a:ea typeface="Times New Roman" pitchFamily="34" charset="-122"/>
+                <a:cs typeface="Times New Roman" pitchFamily="34" charset="-120"/>
+              </a:rPr>
+              <a:t>Surveys: </a:t>
+            </a:r>
+            <a:pPr algn="l" indent="0" marL="0">
+              <a:spcAft>
+                <a:spcPts val="800"/>
+              </a:spcAft>
+              <a:buNone/>
+            </a:pPr>
+            <a:r>
+              <a:rPr lang="en-US" sz="4000" dirty="0">
+                <a:solidFill>
+                  <a:srgbClr val="111111"/>
+                </a:solidFill>
+                <a:latin typeface="Times New Roman" pitchFamily="34" charset="0"/>
+                <a:ea typeface="Times New Roman" pitchFamily="34" charset="-122"/>
+                <a:cs typeface="Times New Roman" pitchFamily="34" charset="-120"/>
+              </a:rPr>
+              <a:t>They study a sample of the population, and they are cheap but less complete.</a:t>
             </a:r>
             <a:endParaRPr lang="en-US" sz="4000" dirty="0"/>
           </a:p>
@@ -14951,7 +15322,7 @@
                 <a:ea typeface="Calibri" pitchFamily="34" charset="-122"/>
                 <a:cs typeface="Calibri" pitchFamily="34" charset="-120"/>
               </a:rPr>
-              <a:t>FORMATIVE EVALUATION</a:t>
+              <a:t>BOARD SUMMARY</a:t>
             </a:r>
             <a:endParaRPr lang="en-US" sz="1400" dirty="0"/>
           </a:p>
@@ -14974,7 +15345,7 @@
         <p:spPr>
           <a:xfrm>
             <a:off x="0" y="658368"/>
-            <a:ext cx="5120640" cy="5833872"/>
+            <a:ext cx="3840480" cy="5833872"/>
           </a:xfrm>
           <a:prstGeom prst="rect">
             <a:avLst/>
@@ -14989,8 +15360,8 @@
         </p:nvSpPr>
         <p:spPr>
           <a:xfrm>
-            <a:off x="5349240" y="1005840"/>
-            <a:ext cx="6522415" cy="731520"/>
+            <a:off x="4069080" y="1005840"/>
+            <a:ext cx="7802575" cy="731520"/>
           </a:xfrm>
           <a:prstGeom prst="rect">
             <a:avLst/>
@@ -15016,7 +15387,7 @@
                 <a:ea typeface="Times New Roman" pitchFamily="34" charset="-122"/>
                 <a:cs typeface="Times New Roman" pitchFamily="34" charset="-120"/>
               </a:rPr>
-              <a:t>Expected Answer</a:t>
+              <a:t>2. Other Sources (continued)</a:t>
             </a:r>
             <a:endParaRPr lang="en-US" sz="3600" dirty="0"/>
           </a:p>
@@ -15030,8 +15401,8 @@
         </p:nvSpPr>
         <p:spPr>
           <a:xfrm>
-            <a:off x="5349240" y="1783080"/>
-            <a:ext cx="6522415" cy="4663440"/>
+            <a:off x="4069080" y="1783080"/>
+            <a:ext cx="7802575" cy="4663440"/>
           </a:xfrm>
           <a:prstGeom prst="rect">
             <a:avLst/>
@@ -15050,7 +15421,7 @@
               <a:buNone/>
             </a:pPr>
             <a:r>
-              <a:rPr lang="en-US" sz="4000" dirty="0">
+              <a:rPr lang="en-US" sz="4000" b="1" dirty="0">
                 <a:solidFill>
                   <a:srgbClr val="111111"/>
                 </a:solidFill>
@@ -15058,7 +15429,61 @@
                 <a:ea typeface="Times New Roman" pitchFamily="34" charset="-122"/>
                 <a:cs typeface="Times New Roman" pitchFamily="34" charset="-120"/>
               </a:rPr>
-              <a:t>The official counting of all the people of a country.</a:t>
+              <a:t>Vital registration: </a:t>
+            </a:r>
+            <a:pPr algn="l" indent="0" marL="0">
+              <a:spcAft>
+                <a:spcPts val="800"/>
+              </a:spcAft>
+              <a:buNone/>
+            </a:pPr>
+            <a:r>
+              <a:rPr lang="en-US" sz="4000" dirty="0">
+                <a:solidFill>
+                  <a:srgbClr val="111111"/>
+                </a:solidFill>
+                <a:latin typeface="Times New Roman" pitchFamily="34" charset="0"/>
+                <a:ea typeface="Times New Roman" pitchFamily="34" charset="-122"/>
+                <a:cs typeface="Times New Roman" pitchFamily="34" charset="-120"/>
+              </a:rPr>
+              <a:t>It records births, deaths and marriages, but many events are not declared.</a:t>
+            </a:r>
+            <a:endParaRPr lang="en-US" sz="4000" dirty="0"/>
+          </a:p>
+          <a:p>
+            <a:pPr algn="l" indent="0" marL="0">
+              <a:spcAft>
+                <a:spcPts val="800"/>
+              </a:spcAft>
+              <a:buNone/>
+            </a:pPr>
+            <a:r>
+              <a:rPr lang="en-US" sz="4000" b="1" dirty="0">
+                <a:solidFill>
+                  <a:srgbClr val="111111"/>
+                </a:solidFill>
+                <a:latin typeface="Times New Roman" pitchFamily="34" charset="0"/>
+                <a:ea typeface="Times New Roman" pitchFamily="34" charset="-122"/>
+                <a:cs typeface="Times New Roman" pitchFamily="34" charset="-120"/>
+              </a:rPr>
+              <a:t>Migration records: </a:t>
+            </a:r>
+            <a:pPr algn="l" indent="0" marL="0">
+              <a:spcAft>
+                <a:spcPts val="800"/>
+              </a:spcAft>
+              <a:buNone/>
+            </a:pPr>
+            <a:r>
+              <a:rPr lang="en-US" sz="4000" dirty="0">
+                <a:solidFill>
+                  <a:srgbClr val="111111"/>
+                </a:solidFill>
+                <a:latin typeface="Times New Roman" pitchFamily="34" charset="0"/>
+                <a:ea typeface="Times New Roman" pitchFamily="34" charset="-122"/>
+                <a:cs typeface="Times New Roman" pitchFamily="34" charset="-120"/>
+              </a:rPr>
+              <a:t>They record people crossing borders, but clandestine migrants escape them.</a:t>
             </a:r>
             <a:endParaRPr lang="en-US" sz="4000" dirty="0"/>
           </a:p>
@@ -15235,7 +15660,7 @@
                 <a:ea typeface="Times New Roman" pitchFamily="34" charset="-122"/>
                 <a:cs typeface="Times New Roman" pitchFamily="34" charset="-120"/>
               </a:rPr>
-              <a:t>Evaluation 2</a:t>
+              <a:t>Evaluation 1</a:t>
             </a:r>
             <a:endParaRPr lang="en-US" sz="3600" dirty="0"/>
           </a:p>
@@ -15277,7 +15702,7 @@
                 <a:ea typeface="Times New Roman" pitchFamily="34" charset="-122"/>
                 <a:cs typeface="Times New Roman" pitchFamily="34" charset="-120"/>
               </a:rPr>
-              <a:t>Give one weakness of vital registration in Cameroon.</a:t>
+              <a:t>What is a census?</a:t>
             </a:r>
             <a:endParaRPr lang="en-US" sz="4000" dirty="0"/>
           </a:p>
@@ -15496,7 +15921,7 @@
                 <a:ea typeface="Times New Roman" pitchFamily="34" charset="-122"/>
                 <a:cs typeface="Times New Roman" pitchFamily="34" charset="-120"/>
               </a:rPr>
-              <a:t>Many births and deaths are not declared.</a:t>
+              <a:t>The official counting of all the people of a country.</a:t>
             </a:r>
             <a:endParaRPr lang="en-US" sz="4000" dirty="0"/>
           </a:p>
@@ -15608,7 +16033,7 @@
                 <a:ea typeface="Calibri" pitchFamily="34" charset="-122"/>
                 <a:cs typeface="Calibri" pitchFamily="34" charset="-120"/>
               </a:rPr>
-              <a:t>REMEDIATION</a:t>
+              <a:t>FORMATIVE EVALUATION</a:t>
             </a:r>
             <a:endParaRPr lang="en-US" sz="1400" dirty="0"/>
           </a:p>
@@ -15673,7 +16098,7 @@
                 <a:ea typeface="Times New Roman" pitchFamily="34" charset="-122"/>
                 <a:cs typeface="Times New Roman" pitchFamily="34" charset="-120"/>
               </a:rPr>
-              <a:t>Remediation</a:t>
+              <a:t>Evaluation 2</a:t>
             </a:r>
             <a:endParaRPr lang="en-US" sz="3600" dirty="0"/>
           </a:p>
@@ -15707,7 +16132,7 @@
               <a:buNone/>
             </a:pPr>
             <a:r>
-              <a:rPr lang="en-US" sz="4000" b="1" dirty="0">
+              <a:rPr lang="en-US" sz="4000" dirty="0">
                 <a:solidFill>
                   <a:srgbClr val="111111"/>
                 </a:solidFill>
@@ -15715,51 +16140,7 @@
                 <a:ea typeface="Times New Roman" pitchFamily="34" charset="-122"/>
                 <a:cs typeface="Times New Roman" pitchFamily="34" charset="-120"/>
               </a:rPr>
-              <a:t>Fill in the blanks:</a:t>
-            </a:r>
-            <a:endParaRPr lang="en-US" sz="4000" dirty="0"/>
-          </a:p>
-          <a:p>
-            <a:pPr algn="l" marL="342900" indent="-342900">
-              <a:spcAft>
-                <a:spcPts val="800"/>
-              </a:spcAft>
-              <a:buSzPct val="100000"/>
-              <a:buFont typeface="+mj-lt"/>
-              <a:buAutoNum type="arabicPeriod" startAt="1"/>
-            </a:pPr>
-            <a:r>
-              <a:rPr lang="en-US" sz="4000" dirty="0">
-                <a:solidFill>
-                  <a:srgbClr val="111111"/>
-                </a:solidFill>
-                <a:latin typeface="Times New Roman" pitchFamily="34" charset="0"/>
-                <a:ea typeface="Times New Roman" pitchFamily="34" charset="-122"/>
-                <a:cs typeface="Times New Roman" pitchFamily="34" charset="-120"/>
-              </a:rPr>
-              <a:t>The institution in charge of censuses in Cameroon is ______.</a:t>
-            </a:r>
-            <a:endParaRPr lang="en-US" sz="4000" dirty="0"/>
-          </a:p>
-          <a:p>
-            <a:pPr algn="l" marL="342900" indent="-342900">
-              <a:spcAft>
-                <a:spcPts val="800"/>
-              </a:spcAft>
-              <a:buSzPct val="100000"/>
-              <a:buFont typeface="+mj-lt"/>
-              <a:buAutoNum type="arabicPeriod" startAt="1"/>
-            </a:pPr>
-            <a:r>
-              <a:rPr lang="en-US" sz="4000" dirty="0">
-                <a:solidFill>
-                  <a:srgbClr val="111111"/>
-                </a:solidFill>
-                <a:latin typeface="Times New Roman" pitchFamily="34" charset="0"/>
-                <a:ea typeface="Times New Roman" pitchFamily="34" charset="-122"/>
-                <a:cs typeface="Times New Roman" pitchFamily="34" charset="-120"/>
-              </a:rPr>
-              <a:t>Recording births and deaths is ______ registration.</a:t>
+              <a:t>Give one weakness of vital registration in Cameroon.</a:t>
             </a:r>
             <a:endParaRPr lang="en-US" sz="4000" dirty="0"/>
           </a:p>
@@ -15871,7 +16252,7 @@
                 <a:ea typeface="Calibri" pitchFamily="34" charset="-122"/>
                 <a:cs typeface="Calibri" pitchFamily="34" charset="-120"/>
               </a:rPr>
-              <a:t>REMEDIATION</a:t>
+              <a:t>FORMATIVE EVALUATION</a:t>
             </a:r>
             <a:endParaRPr lang="en-US" sz="1400" dirty="0"/>
           </a:p>
@@ -15936,7 +16317,7 @@
                 <a:ea typeface="Times New Roman" pitchFamily="34" charset="-122"/>
                 <a:cs typeface="Times New Roman" pitchFamily="34" charset="-120"/>
               </a:rPr>
-              <a:t>Remediation (continued)</a:t>
+              <a:t>Expected Answer</a:t>
             </a:r>
             <a:endParaRPr lang="en-US" sz="3600" dirty="0"/>
           </a:p>
@@ -15963,13 +16344,11 @@
           <a:bodyPr wrap="square" lIns="0" tIns="0" rIns="0" bIns="0" rtlCol="0" anchor="t"/>
           <a:lstStyle/>
           <a:p>
-            <a:pPr algn="l" marL="342900" indent="-342900">
+            <a:pPr algn="l" indent="0" marL="0">
               <a:spcAft>
                 <a:spcPts val="800"/>
               </a:spcAft>
-              <a:buSzPct val="100000"/>
-              <a:buFont typeface="+mj-lt"/>
-              <a:buAutoNum type="arabicPeriod" startAt="1"/>
+              <a:buNone/>
             </a:pPr>
             <a:r>
               <a:rPr lang="en-US" sz="4000" dirty="0">
@@ -15980,7 +16359,7 @@
                 <a:ea typeface="Times New Roman" pitchFamily="34" charset="-122"/>
                 <a:cs typeface="Times New Roman" pitchFamily="34" charset="-120"/>
               </a:rPr>
-              <a:t>A study of part of the population is a ______.</a:t>
+              <a:t>Many births and deaths are not declared.</a:t>
             </a:r>
             <a:endParaRPr lang="en-US" sz="4000" dirty="0"/>
           </a:p>
@@ -16092,7 +16471,7 @@
                 <a:ea typeface="Calibri" pitchFamily="34" charset="-122"/>
                 <a:cs typeface="Calibri" pitchFamily="34" charset="-120"/>
               </a:rPr>
-              <a:t>HOMEWORK</a:t>
+              <a:t>REMEDIATION</a:t>
             </a:r>
             <a:endParaRPr lang="en-US" sz="1400" dirty="0"/>
           </a:p>
@@ -16157,7 +16536,7 @@
                 <a:ea typeface="Times New Roman" pitchFamily="34" charset="-122"/>
                 <a:cs typeface="Times New Roman" pitchFamily="34" charset="-120"/>
               </a:rPr>
-              <a:t>Homework</a:t>
+              <a:t>Remediation</a:t>
             </a:r>
             <a:endParaRPr lang="en-US" sz="3600" dirty="0"/>
           </a:p>
@@ -16191,7 +16570,7 @@
               <a:buNone/>
             </a:pPr>
             <a:r>
-              <a:rPr lang="en-US" sz="4000" dirty="0">
+              <a:rPr lang="en-US" sz="4000" b="1" dirty="0">
                 <a:solidFill>
                   <a:srgbClr val="111111"/>
                 </a:solidFill>
@@ -16199,7 +16578,51 @@
                 <a:ea typeface="Times New Roman" pitchFamily="34" charset="-122"/>
                 <a:cs typeface="Times New Roman" pitchFamily="34" charset="-120"/>
               </a:rPr>
-              <a:t>Explain two reasons why census figures in Cameroon may be inaccurate.</a:t>
+              <a:t>Fill in the blanks:</a:t>
+            </a:r>
+            <a:endParaRPr lang="en-US" sz="4000" dirty="0"/>
+          </a:p>
+          <a:p>
+            <a:pPr algn="l" marL="342900" indent="-342900">
+              <a:spcAft>
+                <a:spcPts val="800"/>
+              </a:spcAft>
+              <a:buSzPct val="100000"/>
+              <a:buFont typeface="+mj-lt"/>
+              <a:buAutoNum type="arabicPeriod" startAt="1"/>
+            </a:pPr>
+            <a:r>
+              <a:rPr lang="en-US" sz="4000" dirty="0">
+                <a:solidFill>
+                  <a:srgbClr val="111111"/>
+                </a:solidFill>
+                <a:latin typeface="Times New Roman" pitchFamily="34" charset="0"/>
+                <a:ea typeface="Times New Roman" pitchFamily="34" charset="-122"/>
+                <a:cs typeface="Times New Roman" pitchFamily="34" charset="-120"/>
+              </a:rPr>
+              <a:t>The institution in charge of censuses in Cameroon is ______.</a:t>
+            </a:r>
+            <a:endParaRPr lang="en-US" sz="4000" dirty="0"/>
+          </a:p>
+          <a:p>
+            <a:pPr algn="l" marL="342900" indent="-342900">
+              <a:spcAft>
+                <a:spcPts val="800"/>
+              </a:spcAft>
+              <a:buSzPct val="100000"/>
+              <a:buFont typeface="+mj-lt"/>
+              <a:buAutoNum type="arabicPeriod" startAt="1"/>
+            </a:pPr>
+            <a:r>
+              <a:rPr lang="en-US" sz="4000" dirty="0">
+                <a:solidFill>
+                  <a:srgbClr val="111111"/>
+                </a:solidFill>
+                <a:latin typeface="Times New Roman" pitchFamily="34" charset="0"/>
+                <a:ea typeface="Times New Roman" pitchFamily="34" charset="-122"/>
+                <a:cs typeface="Times New Roman" pitchFamily="34" charset="-120"/>
+              </a:rPr>
+              <a:t>Recording births and deaths is ______ registration.</a:t>
             </a:r>
             <a:endParaRPr lang="en-US" sz="4000" dirty="0"/>
           </a:p>
@@ -16311,7 +16734,7 @@
                 <a:ea typeface="Calibri" pitchFamily="34" charset="-122"/>
                 <a:cs typeface="Calibri" pitchFamily="34" charset="-120"/>
               </a:rPr>
-              <a:t>NEXT LESSON</a:t>
+              <a:t>REMEDIATION</a:t>
             </a:r>
             <a:endParaRPr lang="en-US" sz="1400" dirty="0"/>
           </a:p>
@@ -16376,7 +16799,7 @@
                 <a:ea typeface="Times New Roman" pitchFamily="34" charset="-122"/>
                 <a:cs typeface="Times New Roman" pitchFamily="34" charset="-120"/>
               </a:rPr>
-              <a:t>Next Lesson</a:t>
+              <a:t>Remediation (continued)</a:t>
             </a:r>
             <a:endParaRPr lang="en-US" sz="3600" dirty="0"/>
           </a:p>
@@ -16400,17 +16823,19 @@
           <a:ln/>
         </p:spPr>
         <p:txBody>
-          <a:bodyPr wrap="square" lIns="0" tIns="0" rIns="0" bIns="0" rtlCol="0" anchor="ctr"/>
-          <a:lstStyle/>
-          <a:p>
-            <a:pPr algn="ctr" indent="0" marL="0">
+          <a:bodyPr wrap="square" lIns="0" tIns="0" rIns="0" bIns="0" rtlCol="0" anchor="t"/>
+          <a:lstStyle/>
+          <a:p>
+            <a:pPr algn="l" marL="342900" indent="-342900">
               <a:spcAft>
                 <a:spcPts val="800"/>
               </a:spcAft>
-              <a:buNone/>
+              <a:buSzPct val="100000"/>
+              <a:buFont typeface="+mj-lt"/>
+              <a:buAutoNum type="arabicPeriod" startAt="1"/>
             </a:pPr>
             <a:r>
-              <a:rPr lang="en-US" sz="4000" b="1" dirty="0">
+              <a:rPr lang="en-US" sz="4000" dirty="0">
                 <a:solidFill>
                   <a:srgbClr val="111111"/>
                 </a:solidFill>
@@ -16418,27 +16843,7 @@
                 <a:ea typeface="Times New Roman" pitchFamily="34" charset="-122"/>
                 <a:cs typeface="Times New Roman" pitchFamily="34" charset="-120"/>
               </a:rPr>
-              <a:t>Our next lesson will be on:</a:t>
-            </a:r>
-            <a:endParaRPr lang="en-US" sz="4000" dirty="0"/>
-          </a:p>
-          <a:p>
-            <a:pPr algn="ctr" indent="0" marL="0">
-              <a:spcAft>
-                <a:spcPts val="800"/>
-              </a:spcAft>
-              <a:buNone/>
-            </a:pPr>
-            <a:r>
-              <a:rPr lang="en-US" sz="4000" b="1" dirty="0">
-                <a:solidFill>
-                  <a:srgbClr val="990011"/>
-                </a:solidFill>
-                <a:latin typeface="Times New Roman" pitchFamily="34" charset="0"/>
-                <a:ea typeface="Times New Roman" pitchFamily="34" charset="-122"/>
-                <a:cs typeface="Times New Roman" pitchFamily="34" charset="-120"/>
-              </a:rPr>
-              <a:t>Lesson 29: Population Distribution</a:t>
+              <a:t>A study of part of the population is a ______.</a:t>
             </a:r>
             <a:endParaRPr lang="en-US" sz="4000" dirty="0"/>
           </a:p>
@@ -16550,6 +16955,464 @@
                 <a:ea typeface="Calibri" pitchFamily="34" charset="-122"/>
                 <a:cs typeface="Calibri" pitchFamily="34" charset="-120"/>
               </a:rPr>
+              <a:t>HOMEWORK</a:t>
+            </a:r>
+            <a:endParaRPr lang="en-US" sz="1400" dirty="0"/>
+          </a:p>
+        </p:txBody>
+      </p:sp>
+      <p:pic>
+        <p:nvPicPr>
+          <p:cNvPr id="3" name="Image 0" descr="/home/claude/f4/img/minesec_sheet.png">    </p:cNvPr>
+          <p:cNvPicPr>
+            <a:picLocks noChangeAspect="1"/>
+          </p:cNvPicPr>
+          <p:nvPr/>
+        </p:nvPicPr>
+        <p:blipFill>
+          <a:blip r:embed="rId1"/>
+          <a:stretch>
+            <a:fillRect/>
+          </a:stretch>
+        </p:blipFill>
+        <p:spPr>
+          <a:xfrm>
+            <a:off x="0" y="658368"/>
+            <a:ext cx="5120640" cy="5833872"/>
+          </a:xfrm>
+          <a:prstGeom prst="rect">
+            <a:avLst/>
+          </a:prstGeom>
+        </p:spPr>
+      </p:pic>
+      <p:sp>
+        <p:nvSpPr>
+          <p:cNvPr id="4" name="Text 1"/>
+          <p:cNvSpPr/>
+          <p:nvPr/>
+        </p:nvSpPr>
+        <p:spPr>
+          <a:xfrm>
+            <a:off x="5349240" y="1005840"/>
+            <a:ext cx="6522415" cy="731520"/>
+          </a:xfrm>
+          <a:prstGeom prst="rect">
+            <a:avLst/>
+          </a:prstGeom>
+          <a:noFill/>
+          <a:ln/>
+        </p:spPr>
+        <p:txBody>
+          <a:bodyPr wrap="square" lIns="0" tIns="0" rIns="0" bIns="0" rtlCol="0" anchor="ctr">
+            <a:normAutofit/>
+          </a:bodyPr>
+          <a:lstStyle/>
+          <a:p>
+            <a:pPr algn="ctr" indent="0" marL="0">
+              <a:buNone/>
+            </a:pPr>
+            <a:r>
+              <a:rPr lang="en-US" sz="3600" b="1" dirty="0">
+                <a:solidFill>
+                  <a:srgbClr val="990011"/>
+                </a:solidFill>
+                <a:latin typeface="Times New Roman" pitchFamily="34" charset="0"/>
+                <a:ea typeface="Times New Roman" pitchFamily="34" charset="-122"/>
+                <a:cs typeface="Times New Roman" pitchFamily="34" charset="-120"/>
+              </a:rPr>
+              <a:t>Homework</a:t>
+            </a:r>
+            <a:endParaRPr lang="en-US" sz="3600" dirty="0"/>
+          </a:p>
+        </p:txBody>
+      </p:sp>
+      <p:sp>
+        <p:nvSpPr>
+          <p:cNvPr id="5" name="Text 2"/>
+          <p:cNvSpPr/>
+          <p:nvPr/>
+        </p:nvSpPr>
+        <p:spPr>
+          <a:xfrm>
+            <a:off x="5349240" y="1783080"/>
+            <a:ext cx="6522415" cy="4663440"/>
+          </a:xfrm>
+          <a:prstGeom prst="rect">
+            <a:avLst/>
+          </a:prstGeom>
+          <a:noFill/>
+          <a:ln/>
+        </p:spPr>
+        <p:txBody>
+          <a:bodyPr wrap="square" lIns="0" tIns="0" rIns="0" bIns="0" rtlCol="0" anchor="t"/>
+          <a:lstStyle/>
+          <a:p>
+            <a:pPr algn="l" indent="0" marL="0">
+              <a:spcAft>
+                <a:spcPts val="800"/>
+              </a:spcAft>
+              <a:buNone/>
+            </a:pPr>
+            <a:r>
+              <a:rPr lang="en-US" sz="4000" dirty="0">
+                <a:solidFill>
+                  <a:srgbClr val="111111"/>
+                </a:solidFill>
+                <a:latin typeface="Times New Roman" pitchFamily="34" charset="0"/>
+                <a:ea typeface="Times New Roman" pitchFamily="34" charset="-122"/>
+                <a:cs typeface="Times New Roman" pitchFamily="34" charset="-120"/>
+              </a:rPr>
+              <a:t>Explain two reasons why census figures in Cameroon may be inaccurate.</a:t>
+            </a:r>
+            <a:endParaRPr lang="en-US" sz="4000" dirty="0"/>
+          </a:p>
+        </p:txBody>
+      </p:sp>
+      <p:sp>
+        <p:nvSpPr>
+          <p:cNvPr id="25" name="Slide Number Placeholder 0"/>
+          <p:cNvSpPr>
+            <a:spLocks noGrp="1"/>
+          </p:cNvSpPr>
+          <p:nvPr>
+            <p:ph type="sldNum" sz="quarter" idx="4294967295"/>
+          </p:nvPr>
+        </p:nvSpPr>
+        <p:spPr>
+          <a:xfrm>
+            <a:off x="27432" y="91440"/>
+            <a:ext cx="585216" cy="475488"/>
+          </a:xfrm>
+          <a:prstGeom prst="rect">
+            <a:avLst/>
+          </a:prstGeom>
+          <a:extLst>
+            <a:ext uri="{C572A759-6A51-4108-AA02-DFA0A04FC94B}">
+              <ma14:wrappingTextBoxFlag xmlns:ma14="http://schemas.microsoft.com/office/mac/drawingml/2011/main" val="0"/>
+            </a:ext>
+          </a:extLst>
+        </p:spPr>
+        <p:txBody>
+          <a:bodyPr/>
+          <a:lstStyle>
+            <a:lvl1pPr>
+              <a:defRPr sz="2000">
+                <a:solidFill>
+                  <a:srgbClr val="FFFFFF"/>
+                </a:solidFill>
+                <a:latin typeface="Calibri"/>
+                <a:ea typeface="Calibri"/>
+                <a:cs typeface="Calibri"/>
+              </a:defRPr>
+            </a:lvl1pPr>
+          </a:lstStyle>
+          <a:p>
+            <a:pPr algn="ctr"/>
+            <a:fld id="{F7021451-1387-4CA6-816F-3879F97B5CBC}" type="slidenum">
+              <a:rPr b="1" lang="en-US"/>
+              <a:t>47</a:t>
+            </a:fld>
+            <a:endParaRPr lang="en-US"/>
+          </a:p>
+        </p:txBody>
+      </p:sp>
+    </p:spTree>
+  </p:cSld>
+  <p:clrMapOvr>
+    <a:masterClrMapping/>
+  </p:clrMapOvr>
+</p:sld>
+</file>
+
+<file path=ppt/slides/slide48.xml><?xml version="1.0" encoding="utf-8"?>
+<p:sld xmlns:a="http://schemas.openxmlformats.org/drawingml/2006/main" xmlns:r="http://schemas.openxmlformats.org/officeDocument/2006/relationships" xmlns:p="http://schemas.openxmlformats.org/presentationml/2006/main">
+  <p:cSld name="Slide 48">
+    <p:spTree>
+      <p:nvGrpSpPr>
+        <p:cNvPr id="1" name=""/>
+        <p:cNvGrpSpPr/>
+        <p:nvPr/>
+      </p:nvGrpSpPr>
+      <p:grpSpPr>
+        <a:xfrm>
+          <a:off x="0" y="0"/>
+          <a:ext cx="0" cy="0"/>
+          <a:chOff x="0" y="0"/>
+          <a:chExt cx="0" cy="0"/>
+        </a:xfrm>
+      </p:grpSpPr>
+      <p:sp>
+        <p:nvSpPr>
+          <p:cNvPr id="2" name="Text 0"/>
+          <p:cNvSpPr/>
+          <p:nvPr/>
+        </p:nvSpPr>
+        <p:spPr>
+          <a:xfrm>
+            <a:off x="457200" y="713232"/>
+            <a:ext cx="11368735" cy="274320"/>
+          </a:xfrm>
+          <a:prstGeom prst="rect">
+            <a:avLst/>
+          </a:prstGeom>
+          <a:noFill/>
+          <a:ln/>
+        </p:spPr>
+        <p:txBody>
+          <a:bodyPr wrap="square" lIns="0" tIns="0" rIns="0" bIns="0" rtlCol="0" anchor="ctr"/>
+          <a:lstStyle/>
+          <a:p>
+            <a:pPr algn="r" indent="0" marL="0">
+              <a:buNone/>
+            </a:pPr>
+            <a:r>
+              <a:rPr lang="en-US" sz="1400" b="1" dirty="0">
+                <a:solidFill>
+                  <a:srgbClr val="1C3F6E"/>
+                </a:solidFill>
+                <a:latin typeface="Calibri" pitchFamily="34" charset="0"/>
+                <a:ea typeface="Calibri" pitchFamily="34" charset="-122"/>
+                <a:cs typeface="Calibri" pitchFamily="34" charset="-120"/>
+              </a:rPr>
+              <a:t>NEXT LESSON</a:t>
+            </a:r>
+            <a:endParaRPr lang="en-US" sz="1400" dirty="0"/>
+          </a:p>
+        </p:txBody>
+      </p:sp>
+      <p:pic>
+        <p:nvPicPr>
+          <p:cNvPr id="3" name="Image 0" descr="/home/claude/f4/img/minesec_sheet.png">    </p:cNvPr>
+          <p:cNvPicPr>
+            <a:picLocks noChangeAspect="1"/>
+          </p:cNvPicPr>
+          <p:nvPr/>
+        </p:nvPicPr>
+        <p:blipFill>
+          <a:blip r:embed="rId1"/>
+          <a:stretch>
+            <a:fillRect/>
+          </a:stretch>
+        </p:blipFill>
+        <p:spPr>
+          <a:xfrm>
+            <a:off x="0" y="658368"/>
+            <a:ext cx="5120640" cy="5833872"/>
+          </a:xfrm>
+          <a:prstGeom prst="rect">
+            <a:avLst/>
+          </a:prstGeom>
+        </p:spPr>
+      </p:pic>
+      <p:sp>
+        <p:nvSpPr>
+          <p:cNvPr id="4" name="Text 1"/>
+          <p:cNvSpPr/>
+          <p:nvPr/>
+        </p:nvSpPr>
+        <p:spPr>
+          <a:xfrm>
+            <a:off x="5349240" y="1005840"/>
+            <a:ext cx="6522415" cy="731520"/>
+          </a:xfrm>
+          <a:prstGeom prst="rect">
+            <a:avLst/>
+          </a:prstGeom>
+          <a:noFill/>
+          <a:ln/>
+        </p:spPr>
+        <p:txBody>
+          <a:bodyPr wrap="square" lIns="0" tIns="0" rIns="0" bIns="0" rtlCol="0" anchor="ctr">
+            <a:normAutofit/>
+          </a:bodyPr>
+          <a:lstStyle/>
+          <a:p>
+            <a:pPr algn="ctr" indent="0" marL="0">
+              <a:buNone/>
+            </a:pPr>
+            <a:r>
+              <a:rPr lang="en-US" sz="3600" b="1" dirty="0">
+                <a:solidFill>
+                  <a:srgbClr val="990011"/>
+                </a:solidFill>
+                <a:latin typeface="Times New Roman" pitchFamily="34" charset="0"/>
+                <a:ea typeface="Times New Roman" pitchFamily="34" charset="-122"/>
+                <a:cs typeface="Times New Roman" pitchFamily="34" charset="-120"/>
+              </a:rPr>
+              <a:t>Next Lesson</a:t>
+            </a:r>
+            <a:endParaRPr lang="en-US" sz="3600" dirty="0"/>
+          </a:p>
+        </p:txBody>
+      </p:sp>
+      <p:sp>
+        <p:nvSpPr>
+          <p:cNvPr id="5" name="Text 2"/>
+          <p:cNvSpPr/>
+          <p:nvPr/>
+        </p:nvSpPr>
+        <p:spPr>
+          <a:xfrm>
+            <a:off x="5349240" y="1783080"/>
+            <a:ext cx="6522415" cy="4663440"/>
+          </a:xfrm>
+          <a:prstGeom prst="rect">
+            <a:avLst/>
+          </a:prstGeom>
+          <a:noFill/>
+          <a:ln/>
+        </p:spPr>
+        <p:txBody>
+          <a:bodyPr wrap="square" lIns="0" tIns="0" rIns="0" bIns="0" rtlCol="0" anchor="ctr"/>
+          <a:lstStyle/>
+          <a:p>
+            <a:pPr algn="ctr" indent="0" marL="0">
+              <a:spcAft>
+                <a:spcPts val="800"/>
+              </a:spcAft>
+              <a:buNone/>
+            </a:pPr>
+            <a:r>
+              <a:rPr lang="en-US" sz="4000" b="1" dirty="0">
+                <a:solidFill>
+                  <a:srgbClr val="111111"/>
+                </a:solidFill>
+                <a:latin typeface="Times New Roman" pitchFamily="34" charset="0"/>
+                <a:ea typeface="Times New Roman" pitchFamily="34" charset="-122"/>
+                <a:cs typeface="Times New Roman" pitchFamily="34" charset="-120"/>
+              </a:rPr>
+              <a:t>Our next lesson will be on:</a:t>
+            </a:r>
+            <a:endParaRPr lang="en-US" sz="4000" dirty="0"/>
+          </a:p>
+          <a:p>
+            <a:pPr algn="ctr" indent="0" marL="0">
+              <a:spcAft>
+                <a:spcPts val="800"/>
+              </a:spcAft>
+              <a:buNone/>
+            </a:pPr>
+            <a:r>
+              <a:rPr lang="en-US" sz="4000" b="1" dirty="0">
+                <a:solidFill>
+                  <a:srgbClr val="990011"/>
+                </a:solidFill>
+                <a:latin typeface="Times New Roman" pitchFamily="34" charset="0"/>
+                <a:ea typeface="Times New Roman" pitchFamily="34" charset="-122"/>
+                <a:cs typeface="Times New Roman" pitchFamily="34" charset="-120"/>
+              </a:rPr>
+              <a:t>Lesson 29: Population Distribution</a:t>
+            </a:r>
+            <a:endParaRPr lang="en-US" sz="4000" dirty="0"/>
+          </a:p>
+        </p:txBody>
+      </p:sp>
+      <p:sp>
+        <p:nvSpPr>
+          <p:cNvPr id="25" name="Slide Number Placeholder 0"/>
+          <p:cNvSpPr>
+            <a:spLocks noGrp="1"/>
+          </p:cNvSpPr>
+          <p:nvPr>
+            <p:ph type="sldNum" sz="quarter" idx="4294967295"/>
+          </p:nvPr>
+        </p:nvSpPr>
+        <p:spPr>
+          <a:xfrm>
+            <a:off x="27432" y="91440"/>
+            <a:ext cx="585216" cy="475488"/>
+          </a:xfrm>
+          <a:prstGeom prst="rect">
+            <a:avLst/>
+          </a:prstGeom>
+          <a:extLst>
+            <a:ext uri="{C572A759-6A51-4108-AA02-DFA0A04FC94B}">
+              <ma14:wrappingTextBoxFlag xmlns:ma14="http://schemas.microsoft.com/office/mac/drawingml/2011/main" val="0"/>
+            </a:ext>
+          </a:extLst>
+        </p:spPr>
+        <p:txBody>
+          <a:bodyPr/>
+          <a:lstStyle>
+            <a:lvl1pPr>
+              <a:defRPr sz="2000">
+                <a:solidFill>
+                  <a:srgbClr val="FFFFFF"/>
+                </a:solidFill>
+                <a:latin typeface="Calibri"/>
+                <a:ea typeface="Calibri"/>
+                <a:cs typeface="Calibri"/>
+              </a:defRPr>
+            </a:lvl1pPr>
+          </a:lstStyle>
+          <a:p>
+            <a:pPr algn="ctr"/>
+            <a:fld id="{F7021451-1387-4CA6-816F-3879F97B5CBC}" type="slidenum">
+              <a:rPr b="1" lang="en-US"/>
+              <a:t>48</a:t>
+            </a:fld>
+            <a:endParaRPr lang="en-US"/>
+          </a:p>
+        </p:txBody>
+      </p:sp>
+    </p:spTree>
+  </p:cSld>
+  <p:clrMapOvr>
+    <a:masterClrMapping/>
+  </p:clrMapOvr>
+</p:sld>
+</file>
+
+<file path=ppt/slides/slide49.xml><?xml version="1.0" encoding="utf-8"?>
+<p:sld xmlns:a="http://schemas.openxmlformats.org/drawingml/2006/main" xmlns:r="http://schemas.openxmlformats.org/officeDocument/2006/relationships" xmlns:p="http://schemas.openxmlformats.org/presentationml/2006/main">
+  <p:cSld name="Slide 49">
+    <p:spTree>
+      <p:nvGrpSpPr>
+        <p:cNvPr id="1" name=""/>
+        <p:cNvGrpSpPr/>
+        <p:nvPr/>
+      </p:nvGrpSpPr>
+      <p:grpSpPr>
+        <a:xfrm>
+          <a:off x="0" y="0"/>
+          <a:ext cx="0" cy="0"/>
+          <a:chOff x="0" y="0"/>
+          <a:chExt cx="0" cy="0"/>
+        </a:xfrm>
+      </p:grpSpPr>
+      <p:sp>
+        <p:nvSpPr>
+          <p:cNvPr id="2" name="Text 0"/>
+          <p:cNvSpPr/>
+          <p:nvPr/>
+        </p:nvSpPr>
+        <p:spPr>
+          <a:xfrm>
+            <a:off x="457200" y="713232"/>
+            <a:ext cx="11368735" cy="274320"/>
+          </a:xfrm>
+          <a:prstGeom prst="rect">
+            <a:avLst/>
+          </a:prstGeom>
+          <a:noFill/>
+          <a:ln/>
+        </p:spPr>
+        <p:txBody>
+          <a:bodyPr wrap="square" lIns="0" tIns="0" rIns="0" bIns="0" rtlCol="0" anchor="ctr"/>
+          <a:lstStyle/>
+          <a:p>
+            <a:pPr algn="r" indent="0" marL="0">
+              <a:buNone/>
+            </a:pPr>
+            <a:r>
+              <a:rPr lang="en-US" sz="1400" b="1" dirty="0">
+                <a:solidFill>
+                  <a:srgbClr val="1C3F6E"/>
+                </a:solidFill>
+                <a:latin typeface="Calibri" pitchFamily="34" charset="0"/>
+                <a:ea typeface="Calibri" pitchFamily="34" charset="-122"/>
+                <a:cs typeface="Calibri" pitchFamily="34" charset="-120"/>
+              </a:rPr>
               <a:t>BILINGUAL GAME</a:t>
             </a:r>
             <a:endParaRPr lang="en-US" sz="1400" dirty="0"/>
@@ -16597,7 +17460,7 @@
       </p:sp>
       <p:graphicFrame>
         <p:nvGraphicFramePr>
-          <p:cNvPr id="48" name="Table 0"/>
+          <p:cNvPr id="50" name="Table 0"/>
           <p:cNvGraphicFramePr>
             <a:graphicFrameLocks noGrp="1"/>
           </p:cNvGraphicFramePr>
@@ -17633,7 +18496,7 @@
             <a:pPr algn="ctr"/>
             <a:fld id="{F7021451-1387-4CA6-816F-3879F97B5CBC}" type="slidenum">
               <a:rPr b="1" lang="en-US"/>
-              <a:t>47</a:t>
+              <a:t>49</a:t>
             </a:fld>
             <a:endParaRPr lang="en-US"/>
           </a:p>
@@ -17647,9 +18510,9 @@
 </p:sld>
 </file>
 
-<file path=ppt/slides/slide48.xml><?xml version="1.0" encoding="utf-8"?>
+<file path=ppt/slides/slide5.xml><?xml version="1.0" encoding="utf-8"?>
 <p:sld xmlns:a="http://schemas.openxmlformats.org/drawingml/2006/main" xmlns:r="http://schemas.openxmlformats.org/officeDocument/2006/relationships" xmlns:p="http://schemas.openxmlformats.org/presentationml/2006/main">
-  <p:cSld name="Slide 48">
+  <p:cSld name="Slide 5">
     <p:spTree>
       <p:nvGrpSpPr>
         <p:cNvPr id="1" name=""/>
@@ -17697,6 +18560,225 @@
                 <a:ea typeface="Calibri" pitchFamily="34" charset="-122"/>
                 <a:cs typeface="Calibri" pitchFamily="34" charset="-120"/>
               </a:rPr>
+              <a:t>HOMEWORK CORRECTION</a:t>
+            </a:r>
+            <a:endParaRPr lang="en-US" sz="1400" dirty="0"/>
+          </a:p>
+        </p:txBody>
+      </p:sp>
+      <p:pic>
+        <p:nvPicPr>
+          <p:cNvPr id="3" name="Image 0" descr="/home/claude/f4/img/minesec_sheet.png">    </p:cNvPr>
+          <p:cNvPicPr>
+            <a:picLocks noChangeAspect="1"/>
+          </p:cNvPicPr>
+          <p:nvPr/>
+        </p:nvPicPr>
+        <p:blipFill>
+          <a:blip r:embed="rId1"/>
+          <a:stretch>
+            <a:fillRect/>
+          </a:stretch>
+        </p:blipFill>
+        <p:spPr>
+          <a:xfrm>
+            <a:off x="0" y="658368"/>
+            <a:ext cx="5120640" cy="5833872"/>
+          </a:xfrm>
+          <a:prstGeom prst="rect">
+            <a:avLst/>
+          </a:prstGeom>
+        </p:spPr>
+      </p:pic>
+      <p:sp>
+        <p:nvSpPr>
+          <p:cNvPr id="4" name="Text 1"/>
+          <p:cNvSpPr/>
+          <p:nvPr/>
+        </p:nvSpPr>
+        <p:spPr>
+          <a:xfrm>
+            <a:off x="5349240" y="1005840"/>
+            <a:ext cx="6522415" cy="731520"/>
+          </a:xfrm>
+          <a:prstGeom prst="rect">
+            <a:avLst/>
+          </a:prstGeom>
+          <a:noFill/>
+          <a:ln/>
+        </p:spPr>
+        <p:txBody>
+          <a:bodyPr wrap="square" lIns="0" tIns="0" rIns="0" bIns="0" rtlCol="0" anchor="ctr">
+            <a:normAutofit/>
+          </a:bodyPr>
+          <a:lstStyle/>
+          <a:p>
+            <a:pPr algn="ctr" indent="0" marL="0">
+              <a:buNone/>
+            </a:pPr>
+            <a:r>
+              <a:rPr lang="en-US" sz="3600" b="1" dirty="0">
+                <a:solidFill>
+                  <a:srgbClr val="990011"/>
+                </a:solidFill>
+                <a:latin typeface="Times New Roman" pitchFamily="34" charset="0"/>
+                <a:ea typeface="Times New Roman" pitchFamily="34" charset="-122"/>
+                <a:cs typeface="Times New Roman" pitchFamily="34" charset="-120"/>
+              </a:rPr>
+              <a:t>Correction: Possible Answer</a:t>
+            </a:r>
+            <a:endParaRPr lang="en-US" sz="3600" dirty="0"/>
+          </a:p>
+        </p:txBody>
+      </p:sp>
+      <p:sp>
+        <p:nvSpPr>
+          <p:cNvPr id="5" name="Text 2"/>
+          <p:cNvSpPr/>
+          <p:nvPr/>
+        </p:nvSpPr>
+        <p:spPr>
+          <a:xfrm>
+            <a:off x="5349240" y="1783080"/>
+            <a:ext cx="6522415" cy="4663440"/>
+          </a:xfrm>
+          <a:prstGeom prst="rect">
+            <a:avLst/>
+          </a:prstGeom>
+          <a:noFill/>
+          <a:ln/>
+        </p:spPr>
+        <p:txBody>
+          <a:bodyPr wrap="square" lIns="0" tIns="0" rIns="0" bIns="0" rtlCol="0" anchor="t"/>
+          <a:lstStyle/>
+          <a:p>
+            <a:pPr algn="l" indent="0" marL="0">
+              <a:spcAft>
+                <a:spcPts val="800"/>
+              </a:spcAft>
+              <a:buNone/>
+            </a:pPr>
+            <a:r>
+              <a:rPr lang="en-US" sz="4000" dirty="0">
+                <a:solidFill>
+                  <a:srgbClr val="111111"/>
+                </a:solidFill>
+                <a:latin typeface="Times New Roman" pitchFamily="34" charset="0"/>
+                <a:ea typeface="Times New Roman" pitchFamily="34" charset="-122"/>
+                <a:cs typeface="Times New Roman" pitchFamily="34" charset="-120"/>
+              </a:rPr>
+              <a:t>1976: about 7.7 million; 1987: about 10.5 million; 2005: about 17.5 million (about 28 million estimated today).</a:t>
+            </a:r>
+            <a:endParaRPr lang="en-US" sz="4000" dirty="0"/>
+          </a:p>
+        </p:txBody>
+      </p:sp>
+      <p:sp>
+        <p:nvSpPr>
+          <p:cNvPr id="25" name="Slide Number Placeholder 0"/>
+          <p:cNvSpPr>
+            <a:spLocks noGrp="1"/>
+          </p:cNvSpPr>
+          <p:nvPr>
+            <p:ph type="sldNum" sz="quarter" idx="4294967295"/>
+          </p:nvPr>
+        </p:nvSpPr>
+        <p:spPr>
+          <a:xfrm>
+            <a:off x="27432" y="91440"/>
+            <a:ext cx="585216" cy="475488"/>
+          </a:xfrm>
+          <a:prstGeom prst="rect">
+            <a:avLst/>
+          </a:prstGeom>
+          <a:extLst>
+            <a:ext uri="{C572A759-6A51-4108-AA02-DFA0A04FC94B}">
+              <ma14:wrappingTextBoxFlag xmlns:ma14="http://schemas.microsoft.com/office/mac/drawingml/2011/main" val="0"/>
+            </a:ext>
+          </a:extLst>
+        </p:spPr>
+        <p:txBody>
+          <a:bodyPr/>
+          <a:lstStyle>
+            <a:lvl1pPr>
+              <a:defRPr sz="2000">
+                <a:solidFill>
+                  <a:srgbClr val="FFFFFF"/>
+                </a:solidFill>
+                <a:latin typeface="Calibri"/>
+                <a:ea typeface="Calibri"/>
+                <a:cs typeface="Calibri"/>
+              </a:defRPr>
+            </a:lvl1pPr>
+          </a:lstStyle>
+          <a:p>
+            <a:pPr algn="ctr"/>
+            <a:fld id="{F7021451-1387-4CA6-816F-3879F97B5CBC}" type="slidenum">
+              <a:rPr b="1" lang="en-US"/>
+              <a:t>5</a:t>
+            </a:fld>
+            <a:endParaRPr lang="en-US"/>
+          </a:p>
+        </p:txBody>
+      </p:sp>
+    </p:spTree>
+  </p:cSld>
+  <p:clrMapOvr>
+    <a:masterClrMapping/>
+  </p:clrMapOvr>
+</p:sld>
+</file>
+
+<file path=ppt/slides/slide50.xml><?xml version="1.0" encoding="utf-8"?>
+<p:sld xmlns:a="http://schemas.openxmlformats.org/drawingml/2006/main" xmlns:r="http://schemas.openxmlformats.org/officeDocument/2006/relationships" xmlns:p="http://schemas.openxmlformats.org/presentationml/2006/main">
+  <p:cSld name="Slide 50">
+    <p:spTree>
+      <p:nvGrpSpPr>
+        <p:cNvPr id="1" name=""/>
+        <p:cNvGrpSpPr/>
+        <p:nvPr/>
+      </p:nvGrpSpPr>
+      <p:grpSpPr>
+        <a:xfrm>
+          <a:off x="0" y="0"/>
+          <a:ext cx="0" cy="0"/>
+          <a:chOff x="0" y="0"/>
+          <a:chExt cx="0" cy="0"/>
+        </a:xfrm>
+      </p:grpSpPr>
+      <p:sp>
+        <p:nvSpPr>
+          <p:cNvPr id="2" name="Text 0"/>
+          <p:cNvSpPr/>
+          <p:nvPr/>
+        </p:nvSpPr>
+        <p:spPr>
+          <a:xfrm>
+            <a:off x="457200" y="713232"/>
+            <a:ext cx="11368735" cy="274320"/>
+          </a:xfrm>
+          <a:prstGeom prst="rect">
+            <a:avLst/>
+          </a:prstGeom>
+          <a:noFill/>
+          <a:ln/>
+        </p:spPr>
+        <p:txBody>
+          <a:bodyPr wrap="square" lIns="0" tIns="0" rIns="0" bIns="0" rtlCol="0" anchor="ctr"/>
+          <a:lstStyle/>
+          <a:p>
+            <a:pPr algn="r" indent="0" marL="0">
+              <a:buNone/>
+            </a:pPr>
+            <a:r>
+              <a:rPr lang="en-US" sz="1400" b="1" dirty="0">
+                <a:solidFill>
+                  <a:srgbClr val="1C3F6E"/>
+                </a:solidFill>
+                <a:latin typeface="Calibri" pitchFamily="34" charset="0"/>
+                <a:ea typeface="Calibri" pitchFamily="34" charset="-122"/>
+                <a:cs typeface="Calibri" pitchFamily="34" charset="-120"/>
+              </a:rPr>
               <a:t>LOGBOOK</a:t>
             </a:r>
             <a:endParaRPr lang="en-US" sz="1400" dirty="0"/>
@@ -17744,7 +18826,7 @@
       </p:sp>
       <p:graphicFrame>
         <p:nvGraphicFramePr>
-          <p:cNvPr id="49" name="Table 0"/>
+          <p:cNvPr id="51" name="Table 0"/>
           <p:cNvGraphicFramePr>
             <a:graphicFrameLocks noGrp="1"/>
           </p:cNvGraphicFramePr>
@@ -18366,7 +19448,7 @@
             <a:pPr algn="ctr"/>
             <a:fld id="{F7021451-1387-4CA6-816F-3879F97B5CBC}" type="slidenum">
               <a:rPr b="1" lang="en-US"/>
-              <a:t>48</a:t>
+              <a:t>50</a:t>
             </a:fld>
             <a:endParaRPr lang="en-US"/>
           </a:p>
@@ -18380,9 +19462,9 @@
 </p:sld>
 </file>
 
-<file path=ppt/slides/slide49.xml><?xml version="1.0" encoding="utf-8"?>
+<file path=ppt/slides/slide51.xml><?xml version="1.0" encoding="utf-8"?>
 <p:sld xmlns:a="http://schemas.openxmlformats.org/drawingml/2006/main" xmlns:r="http://schemas.openxmlformats.org/officeDocument/2006/relationships" xmlns:p="http://schemas.openxmlformats.org/presentationml/2006/main">
-  <p:cSld name="Slide 49">
+  <p:cSld name="Slide 51">
     <p:spTree>
       <p:nvGrpSpPr>
         <p:cNvPr id="1" name=""/>
@@ -18477,7 +19559,7 @@
       </p:sp>
       <p:graphicFrame>
         <p:nvGraphicFramePr>
-          <p:cNvPr id="50" name="Table 0"/>
+          <p:cNvPr id="52" name="Table 0"/>
           <p:cNvGraphicFramePr>
             <a:graphicFrameLocks noGrp="1"/>
           </p:cNvGraphicFramePr>
@@ -18587,7 +19669,7 @@
                           <a:ea typeface="Calibri" pitchFamily="34" charset="-122"/>
                           <a:cs typeface="Calibri" pitchFamily="34" charset="-120"/>
                         </a:rPr>
-                        <a:t>The Census; Other Sources.</a:t>
+                        <a:t>Meaning and Methods; Advantages and Weaknesses; Other Sources.</a:t>
                       </a:r>
                       <a:endParaRPr lang="en-US" sz="1600" dirty="0">
                         <a:latin typeface="Calibri" charset="0"/>
@@ -19237,7 +20319,7 @@
             <a:pPr algn="ctr"/>
             <a:fld id="{F7021451-1387-4CA6-816F-3879F97B5CBC}" type="slidenum">
               <a:rPr b="1" lang="en-US"/>
-              <a:t>49</a:t>
+              <a:t>51</a:t>
             </a:fld>
             <a:endParaRPr lang="en-US"/>
           </a:p>
@@ -19251,9 +20333,9 @@
 </p:sld>
 </file>
 
-<file path=ppt/slides/slide5.xml><?xml version="1.0" encoding="utf-8"?>
+<file path=ppt/slides/slide52.xml><?xml version="1.0" encoding="utf-8"?>
 <p:sld xmlns:a="http://schemas.openxmlformats.org/drawingml/2006/main" xmlns:r="http://schemas.openxmlformats.org/officeDocument/2006/relationships" xmlns:p="http://schemas.openxmlformats.org/presentationml/2006/main">
-  <p:cSld name="Slide 5">
+  <p:cSld name="Slide 52">
     <p:spTree>
       <p:nvGrpSpPr>
         <p:cNvPr id="1" name=""/>
@@ -19301,7 +20383,7 @@
                 <a:ea typeface="Calibri" pitchFamily="34" charset="-122"/>
                 <a:cs typeface="Calibri" pitchFamily="34" charset="-120"/>
               </a:rPr>
-              <a:t>HOMEWORK CORRECTION</a:t>
+              <a:t>TEACHER'S NOTE</a:t>
             </a:r>
             <a:endParaRPr lang="en-US" sz="1400" dirty="0"/>
           </a:p>
@@ -19366,7 +20448,7 @@
                 <a:ea typeface="Times New Roman" pitchFamily="34" charset="-122"/>
                 <a:cs typeface="Times New Roman" pitchFamily="34" charset="-120"/>
               </a:rPr>
-              <a:t>Correction: Possible Answer</a:t>
+              <a:t>Teacher's Note</a:t>
             </a:r>
             <a:endParaRPr lang="en-US" sz="3600" dirty="0"/>
           </a:p>
@@ -19393,24 +20475,130 @@
           <a:bodyPr wrap="square" lIns="0" tIns="0" rIns="0" bIns="0" rtlCol="0" anchor="t"/>
           <a:lstStyle/>
           <a:p>
-            <a:pPr algn="l" indent="0" marL="0">
+            <a:pPr algn="l" marL="342900" indent="-342900">
               <a:spcAft>
                 <a:spcPts val="800"/>
               </a:spcAft>
-              <a:buNone/>
+              <a:buSzPct val="100000"/>
+              <a:buChar char="•"/>
             </a:pPr>
             <a:r>
-              <a:rPr lang="en-US" sz="4000" dirty="0">
+              <a:rPr lang="en-US" sz="2000" dirty="0">
                 <a:solidFill>
                   <a:srgbClr val="111111"/>
                 </a:solidFill>
-                <a:latin typeface="Times New Roman" pitchFamily="34" charset="0"/>
-                <a:ea typeface="Times New Roman" pitchFamily="34" charset="-122"/>
-                <a:cs typeface="Times New Roman" pitchFamily="34" charset="-120"/>
+                <a:latin typeface="Calibri" pitchFamily="34" charset="0"/>
+                <a:ea typeface="Calibri" pitchFamily="34" charset="-122"/>
+                <a:cs typeface="Calibri" pitchFamily="34" charset="-120"/>
               </a:rPr>
-              <a:t>1976: about 7.7 million; 1987: about 10.5 million; 2005: about 17.5 million (about 28 million estimated today).</a:t>
-            </a:r>
-            <a:endParaRPr lang="en-US" sz="4000" dirty="0"/>
+              <a:t>Timing: Homework correction, plan, objectives 8 min | Recall, situation, action 10 min | 5 activities 30 min | Board summary (copying) 30 min | Evaluation, remediation 10 min | Homework, next lesson 5 min | Logbook 7 min</a:t>
+            </a:r>
+            <a:endParaRPr lang="en-US" sz="2000" dirty="0"/>
+          </a:p>
+          <a:p>
+            <a:pPr algn="l" marL="342900" indent="-342900">
+              <a:spcAft>
+                <a:spcPts val="800"/>
+              </a:spcAft>
+              <a:buSzPct val="100000"/>
+              <a:buChar char="•"/>
+            </a:pPr>
+            <a:r>
+              <a:rPr lang="en-US" sz="2000" dirty="0">
+                <a:solidFill>
+                  <a:srgbClr val="111111"/>
+                </a:solidFill>
+                <a:latin typeface="Calibri" pitchFamily="34" charset="0"/>
+                <a:ea typeface="Calibri" pitchFamily="34" charset="-122"/>
+                <a:cs typeface="Calibri" pitchFamily="34" charset="-120"/>
+              </a:rPr>
+              <a:t>Without the projector (Activity 1): discuss.</a:t>
+            </a:r>
+            <a:endParaRPr lang="en-US" sz="2000" dirty="0"/>
+          </a:p>
+          <a:p>
+            <a:pPr algn="l" marL="342900" indent="-342900">
+              <a:spcAft>
+                <a:spcPts val="800"/>
+              </a:spcAft>
+              <a:buSzPct val="100000"/>
+              <a:buChar char="•"/>
+            </a:pPr>
+            <a:r>
+              <a:rPr lang="en-US" sz="2000" dirty="0">
+                <a:solidFill>
+                  <a:srgbClr val="111111"/>
+                </a:solidFill>
+                <a:latin typeface="Calibri" pitchFamily="34" charset="0"/>
+                <a:ea typeface="Calibri" pitchFamily="34" charset="-122"/>
+                <a:cs typeface="Calibri" pitchFamily="34" charset="-120"/>
+              </a:rPr>
+              <a:t>Without the projector (Activity 2): discuss.</a:t>
+            </a:r>
+            <a:endParaRPr lang="en-US" sz="2000" dirty="0"/>
+          </a:p>
+          <a:p>
+            <a:pPr algn="l" marL="342900" indent="-342900">
+              <a:spcAft>
+                <a:spcPts val="800"/>
+              </a:spcAft>
+              <a:buSzPct val="100000"/>
+              <a:buChar char="•"/>
+            </a:pPr>
+            <a:r>
+              <a:rPr lang="en-US" sz="2000" dirty="0">
+                <a:solidFill>
+                  <a:srgbClr val="111111"/>
+                </a:solidFill>
+                <a:latin typeface="Calibri" pitchFamily="34" charset="0"/>
+                <a:ea typeface="Calibri" pitchFamily="34" charset="-122"/>
+                <a:cs typeface="Calibri" pitchFamily="34" charset="-120"/>
+              </a:rPr>
+              <a:t>Without the projector (Activity 3): discuss.</a:t>
+            </a:r>
+            <a:endParaRPr lang="en-US" sz="2000" dirty="0"/>
+          </a:p>
+          <a:p>
+            <a:pPr algn="l" marL="342900" indent="-342900">
+              <a:spcAft>
+                <a:spcPts val="800"/>
+              </a:spcAft>
+              <a:buSzPct val="100000"/>
+              <a:buChar char="•"/>
+            </a:pPr>
+            <a:r>
+              <a:rPr lang="en-US" sz="2000" dirty="0">
+                <a:solidFill>
+                  <a:srgbClr val="111111"/>
+                </a:solidFill>
+                <a:latin typeface="Calibri" pitchFamily="34" charset="0"/>
+                <a:ea typeface="Calibri" pitchFamily="34" charset="-122"/>
+                <a:cs typeface="Calibri" pitchFamily="34" charset="-120"/>
+              </a:rPr>
+              <a:t>Without the projector (Activity 4): discuss.</a:t>
+            </a:r>
+            <a:endParaRPr lang="en-US" sz="2000" dirty="0"/>
+          </a:p>
+          <a:p>
+            <a:pPr algn="l" marL="342900" indent="-342900">
+              <a:spcAft>
+                <a:spcPts val="800"/>
+              </a:spcAft>
+              <a:buSzPct val="100000"/>
+              <a:buChar char="•"/>
+            </a:pPr>
+            <a:r>
+              <a:rPr lang="en-US" sz="2000" dirty="0">
+                <a:solidFill>
+                  <a:srgbClr val="111111"/>
+                </a:solidFill>
+                <a:latin typeface="Calibri" pitchFamily="34" charset="0"/>
+                <a:ea typeface="Calibri" pitchFamily="34" charset="-122"/>
+                <a:cs typeface="Calibri" pitchFamily="34" charset="-120"/>
+              </a:rPr>
+              <a:t>Without the projector (Activity 5): discuss.</a:t>
+            </a:r>
+            <a:endParaRPr lang="en-US" sz="2000" dirty="0"/>
           </a:p>
         </p:txBody>
       </p:sp>
@@ -19456,7 +20644,7 @@
             <a:pPr algn="ctr"/>
             <a:fld id="{F7021451-1387-4CA6-816F-3879F97B5CBC}" type="slidenum">
               <a:rPr b="1" lang="en-US"/>
-              <a:t>5</a:t>
+              <a:t>52</a:t>
             </a:fld>
             <a:endParaRPr lang="en-US"/>
           </a:p>
@@ -19470,9 +20658,9 @@
 </p:sld>
 </file>
 
-<file path=ppt/slides/slide50.xml><?xml version="1.0" encoding="utf-8"?>
+<file path=ppt/slides/slide53.xml><?xml version="1.0" encoding="utf-8"?>
 <p:sld xmlns:a="http://schemas.openxmlformats.org/drawingml/2006/main" xmlns:r="http://schemas.openxmlformats.org/officeDocument/2006/relationships" xmlns:p="http://schemas.openxmlformats.org/presentationml/2006/main">
-  <p:cSld name="Slide 50">
+  <p:cSld name="Slide 53">
     <p:spTree>
       <p:nvGrpSpPr>
         <p:cNvPr id="1" name=""/>
@@ -19520,7 +20708,7 @@
                 <a:ea typeface="Calibri" pitchFamily="34" charset="-122"/>
                 <a:cs typeface="Calibri" pitchFamily="34" charset="-120"/>
               </a:rPr>
-              <a:t>TEACHER'S NOTE</a:t>
+              <a:t>REFERENCES</a:t>
             </a:r>
             <a:endParaRPr lang="en-US" sz="1400" dirty="0"/>
           </a:p>
@@ -19543,7 +20731,7 @@
         <p:spPr>
           <a:xfrm>
             <a:off x="0" y="658368"/>
-            <a:ext cx="5120640" cy="5833872"/>
+            <a:ext cx="3840480" cy="5833872"/>
           </a:xfrm>
           <a:prstGeom prst="rect">
             <a:avLst/>
@@ -19558,8 +20746,8 @@
         </p:nvSpPr>
         <p:spPr>
           <a:xfrm>
-            <a:off x="5349240" y="1005840"/>
-            <a:ext cx="6522415" cy="731520"/>
+            <a:off x="4069080" y="1005840"/>
+            <a:ext cx="7802575" cy="731520"/>
           </a:xfrm>
           <a:prstGeom prst="rect">
             <a:avLst/>
@@ -19585,7 +20773,7 @@
                 <a:ea typeface="Times New Roman" pitchFamily="34" charset="-122"/>
                 <a:cs typeface="Times New Roman" pitchFamily="34" charset="-120"/>
               </a:rPr>
-              <a:t>Teacher's Note</a:t>
+              <a:t>References</a:t>
             </a:r>
             <a:endParaRPr lang="en-US" sz="3600" dirty="0"/>
           </a:p>
@@ -19599,8 +20787,8 @@
         </p:nvSpPr>
         <p:spPr>
           <a:xfrm>
-            <a:off x="5349240" y="1783080"/>
-            <a:ext cx="6522415" cy="4663440"/>
+            <a:off x="4069080" y="1783080"/>
+            <a:ext cx="7802575" cy="4663440"/>
           </a:xfrm>
           <a:prstGeom prst="rect">
             <a:avLst/>
@@ -19620,7 +20808,7 @@
               <a:buChar char="•"/>
             </a:pPr>
             <a:r>
-              <a:rPr lang="en-US" sz="2000" dirty="0">
+              <a:rPr lang="en-US" sz="1800" dirty="0">
                 <a:solidFill>
                   <a:srgbClr val="111111"/>
                 </a:solidFill>
@@ -19628,9 +20816,9 @@
                 <a:ea typeface="Calibri" pitchFamily="34" charset="-122"/>
                 <a:cs typeface="Calibri" pitchFamily="34" charset="-120"/>
               </a:rPr>
-              <a:t>Timing: Homework correction, plan, objectives 8 min | Recall, situation, action 10 min | 5 activities 30 min | Board summary (copying) 30 min | Evaluation, remediation 10 min | Homework, next lesson 5 min | Logbook 7 min</a:t>
-            </a:r>
-            <a:endParaRPr lang="en-US" sz="2000" dirty="0"/>
+              <a:t>Geography Syllabus, Forms I–V, MINESEC (2023) — Form 5, Module III: Management of Population Growth and Space Colonisation.</a:t>
+            </a:r>
+            <a:endParaRPr lang="en-US" sz="1800" dirty="0"/>
           </a:p>
           <a:p>
             <a:pPr algn="l" marL="342900" indent="-342900">
@@ -19641,7 +20829,7 @@
               <a:buChar char="•"/>
             </a:pPr>
             <a:r>
-              <a:rPr lang="en-US" sz="2000" dirty="0">
+              <a:rPr lang="en-US" sz="1800" dirty="0">
                 <a:solidFill>
                   <a:srgbClr val="111111"/>
                 </a:solidFill>
@@ -19649,9 +20837,9 @@
                 <a:ea typeface="Calibri" pitchFamily="34" charset="-122"/>
                 <a:cs typeface="Calibri" pitchFamily="34" charset="-120"/>
               </a:rPr>
-              <a:t>Without the projector (Activity 1): discuss.</a:t>
-            </a:r>
-            <a:endParaRPr lang="en-US" sz="2000" dirty="0"/>
+              <a:t>Photo, Activity 3: “Students in Primary Seven at Zanaki Primary School” by World Bank Photo Collection, CC BY-NC-ND 2.0, via Flickr (https://www.flickr.com/photos/10816734@N03/33423887921)</a:t>
+            </a:r>
+            <a:endParaRPr lang="en-US" sz="1800" dirty="0"/>
           </a:p>
           <a:p>
             <a:pPr algn="l" marL="342900" indent="-342900">
@@ -19662,7 +20850,7 @@
               <a:buChar char="•"/>
             </a:pPr>
             <a:r>
-              <a:rPr lang="en-US" sz="2000" dirty="0">
+              <a:rPr lang="en-US" sz="1800" dirty="0">
                 <a:solidFill>
                   <a:srgbClr val="111111"/>
                 </a:solidFill>
@@ -19670,9 +20858,9 @@
                 <a:ea typeface="Calibri" pitchFamily="34" charset="-122"/>
                 <a:cs typeface="Calibri" pitchFamily="34" charset="-120"/>
               </a:rPr>
-              <a:t>Without the projector (Activity 2): discuss.</a:t>
-            </a:r>
-            <a:endParaRPr lang="en-US" sz="2000" dirty="0"/>
+              <a:t>Photo, Activity 4: “Newborn baby rests” by World Bank Photo Collection, CC BY-NC-ND 2.0, via Flickr (https://www.flickr.com/photos/10816734@N03/19845580540)</a:t>
+            </a:r>
+            <a:endParaRPr lang="en-US" sz="1800" dirty="0"/>
           </a:p>
           <a:p>
             <a:pPr algn="l" marL="342900" indent="-342900">
@@ -19683,7 +20871,7 @@
               <a:buChar char="•"/>
             </a:pPr>
             <a:r>
-              <a:rPr lang="en-US" sz="2000" dirty="0">
+              <a:rPr lang="en-US" sz="1800" dirty="0">
                 <a:solidFill>
                   <a:srgbClr val="111111"/>
                 </a:solidFill>
@@ -19691,9 +20879,9 @@
                 <a:ea typeface="Calibri" pitchFamily="34" charset="-122"/>
                 <a:cs typeface="Calibri" pitchFamily="34" charset="-120"/>
               </a:rPr>
-              <a:t>Without the projector (Activity 3): discuss.</a:t>
-            </a:r>
-            <a:endParaRPr lang="en-US" sz="2000" dirty="0"/>
+              <a:t>Photo, Activity 5: “London Heathrow T4 arrivals” by markhillary, CC BY 2.0, via Flickr (https://www.flickr.com/photos/56087830@N00/1568955656)</a:t>
+            </a:r>
+            <a:endParaRPr lang="en-US" sz="1800" dirty="0"/>
           </a:p>
           <a:p>
             <a:pPr algn="l" marL="342900" indent="-342900">
@@ -19704,7 +20892,7 @@
               <a:buChar char="•"/>
             </a:pPr>
             <a:r>
-              <a:rPr lang="en-US" sz="2000" dirty="0">
+              <a:rPr lang="en-US" sz="1800" dirty="0">
                 <a:solidFill>
                   <a:srgbClr val="111111"/>
                 </a:solidFill>
@@ -19712,30 +20900,9 @@
                 <a:ea typeface="Calibri" pitchFamily="34" charset="-122"/>
                 <a:cs typeface="Calibri" pitchFamily="34" charset="-120"/>
               </a:rPr>
-              <a:t>Without the projector (Activity 4): discuss.</a:t>
-            </a:r>
-            <a:endParaRPr lang="en-US" sz="2000" dirty="0"/>
-          </a:p>
-          <a:p>
-            <a:pPr algn="l" marL="342900" indent="-342900">
-              <a:spcAft>
-                <a:spcPts val="800"/>
-              </a:spcAft>
-              <a:buSzPct val="100000"/>
-              <a:buChar char="•"/>
-            </a:pPr>
-            <a:r>
-              <a:rPr lang="en-US" sz="2000" dirty="0">
-                <a:solidFill>
-                  <a:srgbClr val="111111"/>
-                </a:solidFill>
-                <a:latin typeface="Calibri" pitchFamily="34" charset="0"/>
-                <a:ea typeface="Calibri" pitchFamily="34" charset="-122"/>
-                <a:cs typeface="Calibri" pitchFamily="34" charset="-120"/>
-              </a:rPr>
-              <a:t>Without the projector (Activity 5): discuss.</a:t>
-            </a:r>
-            <a:endParaRPr lang="en-US" sz="2000" dirty="0"/>
+              <a:t>Diagrams and animations: drawn for this lesson (Geography Department).</a:t>
+            </a:r>
+            <a:endParaRPr lang="en-US" sz="1800" dirty="0"/>
           </a:p>
         </p:txBody>
       </p:sp>
@@ -19781,311 +20948,7 @@
             <a:pPr algn="ctr"/>
             <a:fld id="{F7021451-1387-4CA6-816F-3879F97B5CBC}" type="slidenum">
               <a:rPr b="1" lang="en-US"/>
-              <a:t>50</a:t>
-            </a:fld>
-            <a:endParaRPr lang="en-US"/>
-          </a:p>
-        </p:txBody>
-      </p:sp>
-    </p:spTree>
-  </p:cSld>
-  <p:clrMapOvr>
-    <a:masterClrMapping/>
-  </p:clrMapOvr>
-</p:sld>
-</file>
-
-<file path=ppt/slides/slide51.xml><?xml version="1.0" encoding="utf-8"?>
-<p:sld xmlns:a="http://schemas.openxmlformats.org/drawingml/2006/main" xmlns:r="http://schemas.openxmlformats.org/officeDocument/2006/relationships" xmlns:p="http://schemas.openxmlformats.org/presentationml/2006/main">
-  <p:cSld name="Slide 51">
-    <p:spTree>
-      <p:nvGrpSpPr>
-        <p:cNvPr id="1" name=""/>
-        <p:cNvGrpSpPr/>
-        <p:nvPr/>
-      </p:nvGrpSpPr>
-      <p:grpSpPr>
-        <a:xfrm>
-          <a:off x="0" y="0"/>
-          <a:ext cx="0" cy="0"/>
-          <a:chOff x="0" y="0"/>
-          <a:chExt cx="0" cy="0"/>
-        </a:xfrm>
-      </p:grpSpPr>
-      <p:sp>
-        <p:nvSpPr>
-          <p:cNvPr id="2" name="Text 0"/>
-          <p:cNvSpPr/>
-          <p:nvPr/>
-        </p:nvSpPr>
-        <p:spPr>
-          <a:xfrm>
-            <a:off x="457200" y="713232"/>
-            <a:ext cx="11368735" cy="274320"/>
-          </a:xfrm>
-          <a:prstGeom prst="rect">
-            <a:avLst/>
-          </a:prstGeom>
-          <a:noFill/>
-          <a:ln/>
-        </p:spPr>
-        <p:txBody>
-          <a:bodyPr wrap="square" lIns="0" tIns="0" rIns="0" bIns="0" rtlCol="0" anchor="ctr"/>
-          <a:lstStyle/>
-          <a:p>
-            <a:pPr algn="r" indent="0" marL="0">
-              <a:buNone/>
-            </a:pPr>
-            <a:r>
-              <a:rPr lang="en-US" sz="1400" b="1" dirty="0">
-                <a:solidFill>
-                  <a:srgbClr val="1C3F6E"/>
-                </a:solidFill>
-                <a:latin typeface="Calibri" pitchFamily="34" charset="0"/>
-                <a:ea typeface="Calibri" pitchFamily="34" charset="-122"/>
-                <a:cs typeface="Calibri" pitchFamily="34" charset="-120"/>
-              </a:rPr>
-              <a:t>REFERENCES</a:t>
-            </a:r>
-            <a:endParaRPr lang="en-US" sz="1400" dirty="0"/>
-          </a:p>
-        </p:txBody>
-      </p:sp>
-      <p:pic>
-        <p:nvPicPr>
-          <p:cNvPr id="3" name="Image 0" descr="/home/claude/f4/img/minesec_sheet.png">    </p:cNvPr>
-          <p:cNvPicPr>
-            <a:picLocks noChangeAspect="1"/>
-          </p:cNvPicPr>
-          <p:nvPr/>
-        </p:nvPicPr>
-        <p:blipFill>
-          <a:blip r:embed="rId1"/>
-          <a:stretch>
-            <a:fillRect/>
-          </a:stretch>
-        </p:blipFill>
-        <p:spPr>
-          <a:xfrm>
-            <a:off x="0" y="658368"/>
-            <a:ext cx="3840480" cy="5833872"/>
-          </a:xfrm>
-          <a:prstGeom prst="rect">
-            <a:avLst/>
-          </a:prstGeom>
-        </p:spPr>
-      </p:pic>
-      <p:sp>
-        <p:nvSpPr>
-          <p:cNvPr id="4" name="Text 1"/>
-          <p:cNvSpPr/>
-          <p:nvPr/>
-        </p:nvSpPr>
-        <p:spPr>
-          <a:xfrm>
-            <a:off x="4069080" y="1005840"/>
-            <a:ext cx="7802575" cy="731520"/>
-          </a:xfrm>
-          <a:prstGeom prst="rect">
-            <a:avLst/>
-          </a:prstGeom>
-          <a:noFill/>
-          <a:ln/>
-        </p:spPr>
-        <p:txBody>
-          <a:bodyPr wrap="square" lIns="0" tIns="0" rIns="0" bIns="0" rtlCol="0" anchor="ctr">
-            <a:normAutofit/>
-          </a:bodyPr>
-          <a:lstStyle/>
-          <a:p>
-            <a:pPr algn="ctr" indent="0" marL="0">
-              <a:buNone/>
-            </a:pPr>
-            <a:r>
-              <a:rPr lang="en-US" sz="3600" b="1" dirty="0">
-                <a:solidFill>
-                  <a:srgbClr val="990011"/>
-                </a:solidFill>
-                <a:latin typeface="Times New Roman" pitchFamily="34" charset="0"/>
-                <a:ea typeface="Times New Roman" pitchFamily="34" charset="-122"/>
-                <a:cs typeface="Times New Roman" pitchFamily="34" charset="-120"/>
-              </a:rPr>
-              <a:t>References</a:t>
-            </a:r>
-            <a:endParaRPr lang="en-US" sz="3600" dirty="0"/>
-          </a:p>
-        </p:txBody>
-      </p:sp>
-      <p:sp>
-        <p:nvSpPr>
-          <p:cNvPr id="5" name="Text 2"/>
-          <p:cNvSpPr/>
-          <p:nvPr/>
-        </p:nvSpPr>
-        <p:spPr>
-          <a:xfrm>
-            <a:off x="4069080" y="1783080"/>
-            <a:ext cx="7802575" cy="4663440"/>
-          </a:xfrm>
-          <a:prstGeom prst="rect">
-            <a:avLst/>
-          </a:prstGeom>
-          <a:noFill/>
-          <a:ln/>
-        </p:spPr>
-        <p:txBody>
-          <a:bodyPr wrap="square" lIns="0" tIns="0" rIns="0" bIns="0" rtlCol="0" anchor="t"/>
-          <a:lstStyle/>
-          <a:p>
-            <a:pPr algn="l" marL="342900" indent="-342900">
-              <a:spcAft>
-                <a:spcPts val="800"/>
-              </a:spcAft>
-              <a:buSzPct val="100000"/>
-              <a:buChar char="•"/>
-            </a:pPr>
-            <a:r>
-              <a:rPr lang="en-US" sz="1800" dirty="0">
-                <a:solidFill>
-                  <a:srgbClr val="111111"/>
-                </a:solidFill>
-                <a:latin typeface="Calibri" pitchFamily="34" charset="0"/>
-                <a:ea typeface="Calibri" pitchFamily="34" charset="-122"/>
-                <a:cs typeface="Calibri" pitchFamily="34" charset="-120"/>
-              </a:rPr>
-              <a:t>Geography Syllabus, Forms I–V, MINESEC (2023) — Form 5, Module III: Management of Population Growth and Space Colonisation.</a:t>
-            </a:r>
-            <a:endParaRPr lang="en-US" sz="1800" dirty="0"/>
-          </a:p>
-          <a:p>
-            <a:pPr algn="l" marL="342900" indent="-342900">
-              <a:spcAft>
-                <a:spcPts val="800"/>
-              </a:spcAft>
-              <a:buSzPct val="100000"/>
-              <a:buChar char="•"/>
-            </a:pPr>
-            <a:r>
-              <a:rPr lang="en-US" sz="1800" dirty="0">
-                <a:solidFill>
-                  <a:srgbClr val="111111"/>
-                </a:solidFill>
-                <a:latin typeface="Calibri" pitchFamily="34" charset="0"/>
-                <a:ea typeface="Calibri" pitchFamily="34" charset="-122"/>
-                <a:cs typeface="Calibri" pitchFamily="34" charset="-120"/>
-              </a:rPr>
-              <a:t>Photo, Activity 3: “Students in Primary Seven at Zanaki Primary School” by World Bank Photo Collection, CC BY-NC-ND 2.0, via Flickr (https://www.flickr.com/photos/10816734@N03/33423887921)</a:t>
-            </a:r>
-            <a:endParaRPr lang="en-US" sz="1800" dirty="0"/>
-          </a:p>
-          <a:p>
-            <a:pPr algn="l" marL="342900" indent="-342900">
-              <a:spcAft>
-                <a:spcPts val="800"/>
-              </a:spcAft>
-              <a:buSzPct val="100000"/>
-              <a:buChar char="•"/>
-            </a:pPr>
-            <a:r>
-              <a:rPr lang="en-US" sz="1800" dirty="0">
-                <a:solidFill>
-                  <a:srgbClr val="111111"/>
-                </a:solidFill>
-                <a:latin typeface="Calibri" pitchFamily="34" charset="0"/>
-                <a:ea typeface="Calibri" pitchFamily="34" charset="-122"/>
-                <a:cs typeface="Calibri" pitchFamily="34" charset="-120"/>
-              </a:rPr>
-              <a:t>Photo, Activity 4: “Newborn baby rests” by World Bank Photo Collection, CC BY-NC-ND 2.0, via Flickr (https://www.flickr.com/photos/10816734@N03/19845580540)</a:t>
-            </a:r>
-            <a:endParaRPr lang="en-US" sz="1800" dirty="0"/>
-          </a:p>
-          <a:p>
-            <a:pPr algn="l" marL="342900" indent="-342900">
-              <a:spcAft>
-                <a:spcPts val="800"/>
-              </a:spcAft>
-              <a:buSzPct val="100000"/>
-              <a:buChar char="•"/>
-            </a:pPr>
-            <a:r>
-              <a:rPr lang="en-US" sz="1800" dirty="0">
-                <a:solidFill>
-                  <a:srgbClr val="111111"/>
-                </a:solidFill>
-                <a:latin typeface="Calibri" pitchFamily="34" charset="0"/>
-                <a:ea typeface="Calibri" pitchFamily="34" charset="-122"/>
-                <a:cs typeface="Calibri" pitchFamily="34" charset="-120"/>
-              </a:rPr>
-              <a:t>Photo, Activity 5: “London Heathrow T4 arrivals” by markhillary, CC BY 2.0, via Flickr (https://www.flickr.com/photos/56087830@N00/1568955656)</a:t>
-            </a:r>
-            <a:endParaRPr lang="en-US" sz="1800" dirty="0"/>
-          </a:p>
-          <a:p>
-            <a:pPr algn="l" marL="342900" indent="-342900">
-              <a:spcAft>
-                <a:spcPts val="800"/>
-              </a:spcAft>
-              <a:buSzPct val="100000"/>
-              <a:buChar char="•"/>
-            </a:pPr>
-            <a:r>
-              <a:rPr lang="en-US" sz="1800" dirty="0">
-                <a:solidFill>
-                  <a:srgbClr val="111111"/>
-                </a:solidFill>
-                <a:latin typeface="Calibri" pitchFamily="34" charset="0"/>
-                <a:ea typeface="Calibri" pitchFamily="34" charset="-122"/>
-                <a:cs typeface="Calibri" pitchFamily="34" charset="-120"/>
-              </a:rPr>
-              <a:t>Diagrams and animations: drawn for this lesson (Geography Department).</a:t>
-            </a:r>
-            <a:endParaRPr lang="en-US" sz="1800" dirty="0"/>
-          </a:p>
-        </p:txBody>
-      </p:sp>
-      <p:sp>
-        <p:nvSpPr>
-          <p:cNvPr id="25" name="Slide Number Placeholder 0"/>
-          <p:cNvSpPr>
-            <a:spLocks noGrp="1"/>
-          </p:cNvSpPr>
-          <p:nvPr>
-            <p:ph type="sldNum" sz="quarter" idx="4294967295"/>
-          </p:nvPr>
-        </p:nvSpPr>
-        <p:spPr>
-          <a:xfrm>
-            <a:off x="27432" y="91440"/>
-            <a:ext cx="585216" cy="475488"/>
-          </a:xfrm>
-          <a:prstGeom prst="rect">
-            <a:avLst/>
-          </a:prstGeom>
-          <a:extLst>
-            <a:ext uri="{C572A759-6A51-4108-AA02-DFA0A04FC94B}">
-              <ma14:wrappingTextBoxFlag xmlns:ma14="http://schemas.microsoft.com/office/mac/drawingml/2011/main" val="0"/>
-            </a:ext>
-          </a:extLst>
-        </p:spPr>
-        <p:txBody>
-          <a:bodyPr/>
-          <a:lstStyle>
-            <a:lvl1pPr>
-              <a:defRPr sz="2000">
-                <a:solidFill>
-                  <a:srgbClr val="FFFFFF"/>
-                </a:solidFill>
-                <a:latin typeface="Calibri"/>
-                <a:ea typeface="Calibri"/>
-                <a:cs typeface="Calibri"/>
-              </a:defRPr>
-            </a:lvl1pPr>
-          </a:lstStyle>
-          <a:p>
-            <a:pPr algn="ctr"/>
-            <a:fld id="{F7021451-1387-4CA6-816F-3879F97B5CBC}" type="slidenum">
-              <a:rPr b="1" lang="en-US"/>
-              <a:t>51</a:t>
+              <a:t>53</a:t>
             </a:fld>
             <a:endParaRPr lang="en-US"/>
           </a:p>
